--- a/SIH_EW_Smart_Scan.pptx
+++ b/SIH_EW_Smart_Scan.pptx
@@ -208,7 +208,7 @@
             <c:idx val="0"/>
             <c:spPr>
               <a:solidFill>
-                <a:srgbClr val="9AA3AF"/>
+                <a:srgbClr val="C9791A"/>
               </a:solidFill>
             </c:spPr>
           </c:dPt>
@@ -216,7 +216,7 @@
             <c:idx val="1"/>
             <c:spPr>
               <a:solidFill>
-                <a:srgbClr val="9AA3AF"/>
+                <a:srgbClr val="A3ADBB"/>
               </a:solidFill>
             </c:spPr>
           </c:dPt>
@@ -224,7 +224,7 @@
             <c:idx val="2"/>
             <c:spPr>
               <a:solidFill>
-                <a:srgbClr val="9AA3AF"/>
+                <a:srgbClr val="8F9BB0"/>
               </a:solidFill>
             </c:spPr>
           </c:dPt>
@@ -232,7 +232,7 @@
             <c:idx val="3"/>
             <c:spPr>
               <a:solidFill>
-                <a:srgbClr val="0070C0"/>
+                <a:srgbClr val="2D7FE0"/>
               </a:solidFill>
             </c:spPr>
           </c:dPt>
@@ -240,7 +240,7 @@
             <c:idx val="4"/>
             <c:spPr>
               <a:solidFill>
-                <a:srgbClr val="1E8C45"/>
+                <a:srgbClr val="5FB89B"/>
               </a:solidFill>
             </c:spPr>
           </c:dPt>
@@ -248,7 +248,7 @@
             <c:idx val="5"/>
             <c:spPr>
               <a:solidFill>
-                <a:srgbClr val="E86A10"/>
+                <a:srgbClr val="0B8F6E"/>
               </a:solidFill>
             </c:spPr>
           </c:dPt>
@@ -5847,7 +5847,7 @@
                 </a:solidFill>
                 <a:latin typeface="Garamond" panose="02020404030301010803" pitchFamily="18" charset="0"/>
               </a:rPr>
-              <a:t>SMART INDIA HACKATHON 2024</a:t>
+              <a:t>SMART INDIA HACKATHON 2026</a:t>
             </a:r>
             <a:endParaRPr lang="en-IN" sz="4000" b="1" dirty="0">
               <a:solidFill>
@@ -5975,7 +5975,7 @@
                 <a:latin typeface="Arial" panose="020B0604020202020204" pitchFamily="34" charset="0"/>
                 <a:cs typeface="Arial" panose="020B0604020202020204" pitchFamily="34" charset="0"/>
               </a:rPr>
-              <a:t>Team Name (Registered on portal)</a:t>
+              <a:t>Team Name- Out of Bounds</a:t>
             </a:r>
             <a:endParaRPr lang="en-IN" sz="2400" b="1" dirty="0">
               <a:latin typeface="Arial" panose="020B0604020202020204" pitchFamily="34" charset="0"/>
@@ -5994,13 +5994,13 @@
           <a:blip r:embed="rId3">
             <a:alphaModFix/>
           </a:blip>
-          <a:srcRect/>
+          <a:srcRect r="57500"/>
           <a:stretch/>
         </p:blipFill>
         <p:spPr>
           <a:xfrm>
             <a:off x="9803911" y="81376"/>
-            <a:ext cx="2246575" cy="1149075"/>
+            <a:ext cx="954794" cy="1149075"/>
           </a:xfrm>
           <a:prstGeom prst="rect">
             <a:avLst/>
@@ -6011,6 +6011,77 @@
           </a:ln>
         </p:spPr>
       </p:pic>
+      <p:sp>
+        <p:nvSpPr>
+          <p:cNvPr id="38" name="TextBox 37"/>
+          <p:cNvSpPr txBox="1"/>
+          <p:nvPr/>
+        </p:nvSpPr>
+        <p:spPr>
+          <a:xfrm>
+            <a:off x="10776992" y="200248"/>
+            <a:ext cx="1280160" cy="914400"/>
+          </a:xfrm>
+          <a:prstGeom prst="rect">
+            <a:avLst/>
+          </a:prstGeom>
+          <a:noFill/>
+        </p:spPr>
+        <p:txBody>
+          <a:bodyPr wrap="none" lIns="0" rIns="0" tIns="0" bIns="0">
+            <a:spAutoFit/>
+          </a:bodyPr>
+          <a:lstStyle/>
+          <a:p>
+            <a:pPr algn="ctr">
+              <a:lnSpc>
+                <a:spcPct val="95000"/>
+              </a:lnSpc>
+            </a:pPr>
+            <a:r>
+              <a:rPr sz="1400" b="1">
+                <a:solidFill>
+                  <a:srgbClr val="415861"/>
+                </a:solidFill>
+                <a:latin typeface="Arial"/>
+              </a:rPr>
+              <a:t>SMART INDIA</a:t>
+            </a:r>
+          </a:p>
+          <a:p>
+            <a:pPr algn="ctr">
+              <a:lnSpc>
+                <a:spcPct val="95000"/>
+              </a:lnSpc>
+            </a:pPr>
+            <a:r>
+              <a:rPr sz="1400" b="1">
+                <a:solidFill>
+                  <a:srgbClr val="415861"/>
+                </a:solidFill>
+                <a:latin typeface="Arial"/>
+              </a:rPr>
+              <a:t>HACKATHON</a:t>
+            </a:r>
+          </a:p>
+          <a:p>
+            <a:pPr algn="ctr">
+              <a:lnSpc>
+                <a:spcPct val="95000"/>
+              </a:lnSpc>
+            </a:pPr>
+            <a:r>
+              <a:rPr sz="1400" b="1">
+                <a:solidFill>
+                  <a:srgbClr val="415861"/>
+                </a:solidFill>
+                <a:latin typeface="Arial"/>
+              </a:rPr>
+              <a:t>2026</a:t>
+            </a:r>
+          </a:p>
+        </p:txBody>
+      </p:sp>
     </p:spTree>
   </p:cSld>
   <p:clrMapOvr>
@@ -6257,7 +6328,7 @@
             <a:pPr algn="ctr"/>
             <a:r>
               <a:rPr lang="en-US" dirty="0"/>
-              <a:t>Your Team Name</a:t>
+              <a:t>Out of Bounds</a:t>
             </a:r>
             <a:endParaRPr lang="en-IN" dirty="0"/>
           </a:p>
@@ -6273,13 +6344,13 @@
           <a:blip r:embed="rId3">
             <a:alphaModFix/>
           </a:blip>
-          <a:srcRect/>
+          <a:srcRect r="57500"/>
           <a:stretch/>
         </p:blipFill>
         <p:spPr>
           <a:xfrm>
             <a:off x="9803911" y="81376"/>
-            <a:ext cx="2246575" cy="1149075"/>
+            <a:ext cx="954794" cy="1149075"/>
           </a:xfrm>
           <a:prstGeom prst="rect">
             <a:avLst/>
@@ -6585,7 +6656,7 @@
                 </a:solidFill>
                 <a:latin typeface="Arial"/>
               </a:rPr>
-              <a:t>Live web dashboard for demo and analysis</a:t>
+              <a:t>Web dashboard with simple and annotated views</a:t>
             </a:r>
           </a:p>
         </p:txBody>
@@ -7128,6 +7199,77 @@
                 <a:latin typeface="Arial"/>
               </a:rPr>
               <a:t>+78% interception ratio  |  +85% threat-weighted  |  15% fresher emitter picture vs conventional sweep</a:t>
+            </a:r>
+          </a:p>
+        </p:txBody>
+      </p:sp>
+      <p:sp>
+        <p:nvSpPr>
+          <p:cNvPr id="15378" name="TextBox 15377"/>
+          <p:cNvSpPr txBox="1"/>
+          <p:nvPr/>
+        </p:nvSpPr>
+        <p:spPr>
+          <a:xfrm>
+            <a:off x="10776992" y="200248"/>
+            <a:ext cx="1280160" cy="914400"/>
+          </a:xfrm>
+          <a:prstGeom prst="rect">
+            <a:avLst/>
+          </a:prstGeom>
+          <a:noFill/>
+        </p:spPr>
+        <p:txBody>
+          <a:bodyPr wrap="none" lIns="0" rIns="0" tIns="0" bIns="0">
+            <a:spAutoFit/>
+          </a:bodyPr>
+          <a:lstStyle/>
+          <a:p>
+            <a:pPr algn="ctr">
+              <a:lnSpc>
+                <a:spcPct val="95000"/>
+              </a:lnSpc>
+            </a:pPr>
+            <a:r>
+              <a:rPr sz="1400" b="1">
+                <a:solidFill>
+                  <a:srgbClr val="415861"/>
+                </a:solidFill>
+                <a:latin typeface="Arial"/>
+              </a:rPr>
+              <a:t>SMART INDIA</a:t>
+            </a:r>
+          </a:p>
+          <a:p>
+            <a:pPr algn="ctr">
+              <a:lnSpc>
+                <a:spcPct val="95000"/>
+              </a:lnSpc>
+            </a:pPr>
+            <a:r>
+              <a:rPr sz="1400" b="1">
+                <a:solidFill>
+                  <a:srgbClr val="415861"/>
+                </a:solidFill>
+                <a:latin typeface="Arial"/>
+              </a:rPr>
+              <a:t>HACKATHON</a:t>
+            </a:r>
+          </a:p>
+          <a:p>
+            <a:pPr algn="ctr">
+              <a:lnSpc>
+                <a:spcPct val="95000"/>
+              </a:lnSpc>
+            </a:pPr>
+            <a:r>
+              <a:rPr sz="1400" b="1">
+                <a:solidFill>
+                  <a:srgbClr val="415861"/>
+                </a:solidFill>
+                <a:latin typeface="Arial"/>
+              </a:rPr>
+              <a:t>2026</a:t>
             </a:r>
           </a:p>
         </p:txBody>
@@ -7329,13 +7471,13 @@
           <a:blip r:embed="rId3">
             <a:alphaModFix/>
           </a:blip>
-          <a:srcRect/>
+          <a:srcRect r="57500"/>
           <a:stretch/>
         </p:blipFill>
         <p:spPr>
           <a:xfrm>
             <a:off x="9803911" y="81376"/>
-            <a:ext cx="2246575" cy="1149075"/>
+            <a:ext cx="954794" cy="1149075"/>
           </a:xfrm>
           <a:prstGeom prst="rect">
             <a:avLst/>
@@ -7391,7 +7533,7 @@
             <a:pPr algn="ctr"/>
             <a:r>
               <a:rPr lang="en-US" dirty="0"/>
-              <a:t>Your Team Name</a:t>
+              <a:t>Out of Bounds</a:t>
             </a:r>
             <a:endParaRPr lang="en-IN" dirty="0"/>
           </a:p>
@@ -7431,690 +7573,6 @@
                 <a:latin typeface="Arial"/>
               </a:rPr>
               <a:t>Technologies</a:t>
-            </a:r>
-          </a:p>
-        </p:txBody>
-      </p:sp>
-      <p:sp>
-        <p:nvSpPr>
-          <p:cNvPr id="17411" name="Rounded Rectangle 17410"/>
-          <p:cNvSpPr/>
-          <p:nvPr/>
-        </p:nvSpPr>
-        <p:spPr>
-          <a:xfrm>
-            <a:off x="457200" y="1737360"/>
-            <a:ext cx="3840480" cy="566928"/>
-          </a:xfrm>
-          <a:prstGeom prst="roundRect">
-            <a:avLst>
-              <a:gd name="adj" fmla="val 8000"/>
-            </a:avLst>
-          </a:prstGeom>
-          <a:solidFill>
-            <a:srgbClr val="EEF3FA"/>
-          </a:solidFill>
-          <a:ln>
-            <a:noFill/>
-          </a:ln>
-          <a:effectLst/>
-        </p:spPr>
-        <p:style>
-          <a:lnRef idx="1">
-            <a:schemeClr val="accent1"/>
-          </a:lnRef>
-          <a:fillRef idx="3">
-            <a:schemeClr val="accent1"/>
-          </a:fillRef>
-          <a:effectRef idx="2">
-            <a:schemeClr val="accent1"/>
-          </a:effectRef>
-          <a:fontRef idx="minor">
-            <a:schemeClr val="lt1"/>
-          </a:fontRef>
-        </p:style>
-        <p:txBody>
-          <a:bodyPr rtlCol="0" anchor="ctr"/>
-          <a:lstStyle/>
-          <a:p/>
-        </p:txBody>
-      </p:sp>
-      <p:sp>
-        <p:nvSpPr>
-          <p:cNvPr id="17412" name="TextBox 17411"/>
-          <p:cNvSpPr txBox="1"/>
-          <p:nvPr/>
-        </p:nvSpPr>
-        <p:spPr>
-          <a:xfrm>
-            <a:off x="566928" y="1737360"/>
-            <a:ext cx="1234440" cy="566928"/>
-          </a:xfrm>
-          <a:prstGeom prst="rect">
-            <a:avLst/>
-          </a:prstGeom>
-          <a:noFill/>
-        </p:spPr>
-        <p:txBody>
-          <a:bodyPr wrap="square" anchor="ctr" lIns="45720" rIns="45720">
-            <a:spAutoFit/>
-          </a:bodyPr>
-          <a:lstStyle/>
-          <a:p>
-            <a:pPr algn="l"/>
-            <a:r>
-              <a:rPr sz="1200" b="1" i="0">
-                <a:solidFill>
-                  <a:srgbClr val="1F3B6E"/>
-                </a:solidFill>
-                <a:latin typeface="Arial"/>
-              </a:rPr>
-              <a:t>Language</a:t>
-            </a:r>
-          </a:p>
-        </p:txBody>
-      </p:sp>
-      <p:sp>
-        <p:nvSpPr>
-          <p:cNvPr id="17413" name="TextBox 17412"/>
-          <p:cNvSpPr txBox="1"/>
-          <p:nvPr/>
-        </p:nvSpPr>
-        <p:spPr>
-          <a:xfrm>
-            <a:off x="1783080" y="1737360"/>
-            <a:ext cx="2468880" cy="566928"/>
-          </a:xfrm>
-          <a:prstGeom prst="rect">
-            <a:avLst/>
-          </a:prstGeom>
-          <a:noFill/>
-        </p:spPr>
-        <p:txBody>
-          <a:bodyPr wrap="square" anchor="ctr" lIns="45720" rIns="45720">
-            <a:spAutoFit/>
-          </a:bodyPr>
-          <a:lstStyle/>
-          <a:p>
-            <a:pPr algn="l"/>
-            <a:r>
-              <a:rPr sz="1200" b="0" i="0">
-                <a:solidFill>
-                  <a:srgbClr val="222222"/>
-                </a:solidFill>
-                <a:latin typeface="Arial"/>
-              </a:rPr>
-              <a:t>Python 3.11, JavaScript</a:t>
-            </a:r>
-          </a:p>
-        </p:txBody>
-      </p:sp>
-      <p:sp>
-        <p:nvSpPr>
-          <p:cNvPr id="17414" name="Rounded Rectangle 17413"/>
-          <p:cNvSpPr/>
-          <p:nvPr/>
-        </p:nvSpPr>
-        <p:spPr>
-          <a:xfrm>
-            <a:off x="457200" y="2395728"/>
-            <a:ext cx="3840480" cy="566928"/>
-          </a:xfrm>
-          <a:prstGeom prst="roundRect">
-            <a:avLst>
-              <a:gd name="adj" fmla="val 8000"/>
-            </a:avLst>
-          </a:prstGeom>
-          <a:solidFill>
-            <a:srgbClr val="EEF3FA"/>
-          </a:solidFill>
-          <a:ln>
-            <a:noFill/>
-          </a:ln>
-          <a:effectLst/>
-        </p:spPr>
-        <p:style>
-          <a:lnRef idx="1">
-            <a:schemeClr val="accent1"/>
-          </a:lnRef>
-          <a:fillRef idx="3">
-            <a:schemeClr val="accent1"/>
-          </a:fillRef>
-          <a:effectRef idx="2">
-            <a:schemeClr val="accent1"/>
-          </a:effectRef>
-          <a:fontRef idx="minor">
-            <a:schemeClr val="lt1"/>
-          </a:fontRef>
-        </p:style>
-        <p:txBody>
-          <a:bodyPr rtlCol="0" anchor="ctr"/>
-          <a:lstStyle/>
-          <a:p/>
-        </p:txBody>
-      </p:sp>
-      <p:sp>
-        <p:nvSpPr>
-          <p:cNvPr id="17415" name="TextBox 17414"/>
-          <p:cNvSpPr txBox="1"/>
-          <p:nvPr/>
-        </p:nvSpPr>
-        <p:spPr>
-          <a:xfrm>
-            <a:off x="566928" y="2395728"/>
-            <a:ext cx="1234440" cy="566928"/>
-          </a:xfrm>
-          <a:prstGeom prst="rect">
-            <a:avLst/>
-          </a:prstGeom>
-          <a:noFill/>
-        </p:spPr>
-        <p:txBody>
-          <a:bodyPr wrap="square" anchor="ctr" lIns="45720" rIns="45720">
-            <a:spAutoFit/>
-          </a:bodyPr>
-          <a:lstStyle/>
-          <a:p>
-            <a:pPr algn="l"/>
-            <a:r>
-              <a:rPr sz="1200" b="1" i="0">
-                <a:solidFill>
-                  <a:srgbClr val="1F3B6E"/>
-                </a:solidFill>
-                <a:latin typeface="Arial"/>
-              </a:rPr>
-              <a:t>ML / DL</a:t>
-            </a:r>
-          </a:p>
-        </p:txBody>
-      </p:sp>
-      <p:sp>
-        <p:nvSpPr>
-          <p:cNvPr id="17416" name="TextBox 17415"/>
-          <p:cNvSpPr txBox="1"/>
-          <p:nvPr/>
-        </p:nvSpPr>
-        <p:spPr>
-          <a:xfrm>
-            <a:off x="1783080" y="2395728"/>
-            <a:ext cx="2468880" cy="566928"/>
-          </a:xfrm>
-          <a:prstGeom prst="rect">
-            <a:avLst/>
-          </a:prstGeom>
-          <a:noFill/>
-        </p:spPr>
-        <p:txBody>
-          <a:bodyPr wrap="square" anchor="ctr" lIns="45720" rIns="45720">
-            <a:spAutoFit/>
-          </a:bodyPr>
-          <a:lstStyle/>
-          <a:p>
-            <a:pPr algn="l"/>
-            <a:r>
-              <a:rPr sz="1200" b="0" i="0">
-                <a:solidFill>
-                  <a:srgbClr val="222222"/>
-                </a:solidFill>
-                <a:latin typeface="Arial"/>
-              </a:rPr>
-              <a:t>PyTorch: GRU predictor, Double-DQN</a:t>
-            </a:r>
-          </a:p>
-        </p:txBody>
-      </p:sp>
-      <p:sp>
-        <p:nvSpPr>
-          <p:cNvPr id="17417" name="Rounded Rectangle 17416"/>
-          <p:cNvSpPr/>
-          <p:nvPr/>
-        </p:nvSpPr>
-        <p:spPr>
-          <a:xfrm>
-            <a:off x="457200" y="3054096"/>
-            <a:ext cx="3840480" cy="566928"/>
-          </a:xfrm>
-          <a:prstGeom prst="roundRect">
-            <a:avLst>
-              <a:gd name="adj" fmla="val 8000"/>
-            </a:avLst>
-          </a:prstGeom>
-          <a:solidFill>
-            <a:srgbClr val="EEF3FA"/>
-          </a:solidFill>
-          <a:ln>
-            <a:noFill/>
-          </a:ln>
-          <a:effectLst/>
-        </p:spPr>
-        <p:style>
-          <a:lnRef idx="1">
-            <a:schemeClr val="accent1"/>
-          </a:lnRef>
-          <a:fillRef idx="3">
-            <a:schemeClr val="accent1"/>
-          </a:fillRef>
-          <a:effectRef idx="2">
-            <a:schemeClr val="accent1"/>
-          </a:effectRef>
-          <a:fontRef idx="minor">
-            <a:schemeClr val="lt1"/>
-          </a:fontRef>
-        </p:style>
-        <p:txBody>
-          <a:bodyPr rtlCol="0" anchor="ctr"/>
-          <a:lstStyle/>
-          <a:p/>
-        </p:txBody>
-      </p:sp>
-      <p:sp>
-        <p:nvSpPr>
-          <p:cNvPr id="17418" name="TextBox 17417"/>
-          <p:cNvSpPr txBox="1"/>
-          <p:nvPr/>
-        </p:nvSpPr>
-        <p:spPr>
-          <a:xfrm>
-            <a:off x="566928" y="3054096"/>
-            <a:ext cx="1234440" cy="566928"/>
-          </a:xfrm>
-          <a:prstGeom prst="rect">
-            <a:avLst/>
-          </a:prstGeom>
-          <a:noFill/>
-        </p:spPr>
-        <p:txBody>
-          <a:bodyPr wrap="square" anchor="ctr" lIns="45720" rIns="45720">
-            <a:spAutoFit/>
-          </a:bodyPr>
-          <a:lstStyle/>
-          <a:p>
-            <a:pPr algn="l"/>
-            <a:r>
-              <a:rPr sz="1200" b="1" i="0">
-                <a:solidFill>
-                  <a:srgbClr val="1F3B6E"/>
-                </a:solidFill>
-                <a:latin typeface="Arial"/>
-              </a:rPr>
-              <a:t>Signal model</a:t>
-            </a:r>
-          </a:p>
-        </p:txBody>
-      </p:sp>
-      <p:sp>
-        <p:nvSpPr>
-          <p:cNvPr id="17419" name="TextBox 17418"/>
-          <p:cNvSpPr txBox="1"/>
-          <p:nvPr/>
-        </p:nvSpPr>
-        <p:spPr>
-          <a:xfrm>
-            <a:off x="1783080" y="3054096"/>
-            <a:ext cx="2468880" cy="566928"/>
-          </a:xfrm>
-          <a:prstGeom prst="rect">
-            <a:avLst/>
-          </a:prstGeom>
-          <a:noFill/>
-        </p:spPr>
-        <p:txBody>
-          <a:bodyPr wrap="square" anchor="ctr" lIns="45720" rIns="45720">
-            <a:spAutoFit/>
-          </a:bodyPr>
-          <a:lstStyle/>
-          <a:p>
-            <a:pPr algn="l"/>
-            <a:r>
-              <a:rPr sz="1200" b="0" i="0">
-                <a:solidFill>
-                  <a:srgbClr val="222222"/>
-                </a:solidFill>
-                <a:latin typeface="Arial"/>
-              </a:rPr>
-              <a:t>NumPy, SciPy (χ² energy detector)</a:t>
-            </a:r>
-          </a:p>
-        </p:txBody>
-      </p:sp>
-      <p:sp>
-        <p:nvSpPr>
-          <p:cNvPr id="17420" name="Rounded Rectangle 17419"/>
-          <p:cNvSpPr/>
-          <p:nvPr/>
-        </p:nvSpPr>
-        <p:spPr>
-          <a:xfrm>
-            <a:off x="457200" y="3712463"/>
-            <a:ext cx="3840480" cy="566928"/>
-          </a:xfrm>
-          <a:prstGeom prst="roundRect">
-            <a:avLst>
-              <a:gd name="adj" fmla="val 8000"/>
-            </a:avLst>
-          </a:prstGeom>
-          <a:solidFill>
-            <a:srgbClr val="EEF3FA"/>
-          </a:solidFill>
-          <a:ln>
-            <a:noFill/>
-          </a:ln>
-          <a:effectLst/>
-        </p:spPr>
-        <p:style>
-          <a:lnRef idx="1">
-            <a:schemeClr val="accent1"/>
-          </a:lnRef>
-          <a:fillRef idx="3">
-            <a:schemeClr val="accent1"/>
-          </a:fillRef>
-          <a:effectRef idx="2">
-            <a:schemeClr val="accent1"/>
-          </a:effectRef>
-          <a:fontRef idx="minor">
-            <a:schemeClr val="lt1"/>
-          </a:fontRef>
-        </p:style>
-        <p:txBody>
-          <a:bodyPr rtlCol="0" anchor="ctr"/>
-          <a:lstStyle/>
-          <a:p/>
-        </p:txBody>
-      </p:sp>
-      <p:sp>
-        <p:nvSpPr>
-          <p:cNvPr id="17421" name="TextBox 17420"/>
-          <p:cNvSpPr txBox="1"/>
-          <p:nvPr/>
-        </p:nvSpPr>
-        <p:spPr>
-          <a:xfrm>
-            <a:off x="566928" y="3712463"/>
-            <a:ext cx="1234440" cy="566928"/>
-          </a:xfrm>
-          <a:prstGeom prst="rect">
-            <a:avLst/>
-          </a:prstGeom>
-          <a:noFill/>
-        </p:spPr>
-        <p:txBody>
-          <a:bodyPr wrap="square" anchor="ctr" lIns="45720" rIns="45720">
-            <a:spAutoFit/>
-          </a:bodyPr>
-          <a:lstStyle/>
-          <a:p>
-            <a:pPr algn="l"/>
-            <a:r>
-              <a:rPr sz="1200" b="1" i="0">
-                <a:solidFill>
-                  <a:srgbClr val="1F3B6E"/>
-                </a:solidFill>
-                <a:latin typeface="Arial"/>
-              </a:rPr>
-              <a:t>Backend</a:t>
-            </a:r>
-          </a:p>
-        </p:txBody>
-      </p:sp>
-      <p:sp>
-        <p:nvSpPr>
-          <p:cNvPr id="17422" name="TextBox 17421"/>
-          <p:cNvSpPr txBox="1"/>
-          <p:nvPr/>
-        </p:nvSpPr>
-        <p:spPr>
-          <a:xfrm>
-            <a:off x="1783080" y="3712463"/>
-            <a:ext cx="2468880" cy="566928"/>
-          </a:xfrm>
-          <a:prstGeom prst="rect">
-            <a:avLst/>
-          </a:prstGeom>
-          <a:noFill/>
-        </p:spPr>
-        <p:txBody>
-          <a:bodyPr wrap="square" anchor="ctr" lIns="45720" rIns="45720">
-            <a:spAutoFit/>
-          </a:bodyPr>
-          <a:lstStyle/>
-          <a:p>
-            <a:pPr algn="l"/>
-            <a:r>
-              <a:rPr sz="1200" b="0" i="0">
-                <a:solidFill>
-                  <a:srgbClr val="222222"/>
-                </a:solidFill>
-                <a:latin typeface="Arial"/>
-              </a:rPr>
-              <a:t>FastAPI, Uvicorn (REST API)</a:t>
-            </a:r>
-          </a:p>
-        </p:txBody>
-      </p:sp>
-      <p:sp>
-        <p:nvSpPr>
-          <p:cNvPr id="17423" name="Rounded Rectangle 17422"/>
-          <p:cNvSpPr/>
-          <p:nvPr/>
-        </p:nvSpPr>
-        <p:spPr>
-          <a:xfrm>
-            <a:off x="457200" y="4370831"/>
-            <a:ext cx="3840480" cy="566928"/>
-          </a:xfrm>
-          <a:prstGeom prst="roundRect">
-            <a:avLst>
-              <a:gd name="adj" fmla="val 8000"/>
-            </a:avLst>
-          </a:prstGeom>
-          <a:solidFill>
-            <a:srgbClr val="EEF3FA"/>
-          </a:solidFill>
-          <a:ln>
-            <a:noFill/>
-          </a:ln>
-          <a:effectLst/>
-        </p:spPr>
-        <p:style>
-          <a:lnRef idx="1">
-            <a:schemeClr val="accent1"/>
-          </a:lnRef>
-          <a:fillRef idx="3">
-            <a:schemeClr val="accent1"/>
-          </a:fillRef>
-          <a:effectRef idx="2">
-            <a:schemeClr val="accent1"/>
-          </a:effectRef>
-          <a:fontRef idx="minor">
-            <a:schemeClr val="lt1"/>
-          </a:fontRef>
-        </p:style>
-        <p:txBody>
-          <a:bodyPr rtlCol="0" anchor="ctr"/>
-          <a:lstStyle/>
-          <a:p/>
-        </p:txBody>
-      </p:sp>
-      <p:sp>
-        <p:nvSpPr>
-          <p:cNvPr id="17424" name="TextBox 17423"/>
-          <p:cNvSpPr txBox="1"/>
-          <p:nvPr/>
-        </p:nvSpPr>
-        <p:spPr>
-          <a:xfrm>
-            <a:off x="566928" y="4370831"/>
-            <a:ext cx="1234440" cy="566928"/>
-          </a:xfrm>
-          <a:prstGeom prst="rect">
-            <a:avLst/>
-          </a:prstGeom>
-          <a:noFill/>
-        </p:spPr>
-        <p:txBody>
-          <a:bodyPr wrap="square" anchor="ctr" lIns="45720" rIns="45720">
-            <a:spAutoFit/>
-          </a:bodyPr>
-          <a:lstStyle/>
-          <a:p>
-            <a:pPr algn="l"/>
-            <a:r>
-              <a:rPr sz="1200" b="1" i="0">
-                <a:solidFill>
-                  <a:srgbClr val="1F3B6E"/>
-                </a:solidFill>
-                <a:latin typeface="Arial"/>
-              </a:rPr>
-              <a:t>Frontend</a:t>
-            </a:r>
-          </a:p>
-        </p:txBody>
-      </p:sp>
-      <p:sp>
-        <p:nvSpPr>
-          <p:cNvPr id="17425" name="TextBox 17424"/>
-          <p:cNvSpPr txBox="1"/>
-          <p:nvPr/>
-        </p:nvSpPr>
-        <p:spPr>
-          <a:xfrm>
-            <a:off x="1783080" y="4370831"/>
-            <a:ext cx="2468880" cy="566928"/>
-          </a:xfrm>
-          <a:prstGeom prst="rect">
-            <a:avLst/>
-          </a:prstGeom>
-          <a:noFill/>
-        </p:spPr>
-        <p:txBody>
-          <a:bodyPr wrap="square" anchor="ctr" lIns="45720" rIns="45720">
-            <a:spAutoFit/>
-          </a:bodyPr>
-          <a:lstStyle/>
-          <a:p>
-            <a:pPr algn="l"/>
-            <a:r>
-              <a:rPr sz="1200" b="0" i="0">
-                <a:solidFill>
-                  <a:srgbClr val="222222"/>
-                </a:solidFill>
-                <a:latin typeface="Arial"/>
-              </a:rPr>
-              <a:t>HTML5 Canvas, Chart.js dashboard</a:t>
-            </a:r>
-          </a:p>
-        </p:txBody>
-      </p:sp>
-      <p:sp>
-        <p:nvSpPr>
-          <p:cNvPr id="17426" name="Rounded Rectangle 17425"/>
-          <p:cNvSpPr/>
-          <p:nvPr/>
-        </p:nvSpPr>
-        <p:spPr>
-          <a:xfrm>
-            <a:off x="457200" y="5029199"/>
-            <a:ext cx="3840480" cy="566928"/>
-          </a:xfrm>
-          <a:prstGeom prst="roundRect">
-            <a:avLst>
-              <a:gd name="adj" fmla="val 8000"/>
-            </a:avLst>
-          </a:prstGeom>
-          <a:solidFill>
-            <a:srgbClr val="EEF3FA"/>
-          </a:solidFill>
-          <a:ln>
-            <a:noFill/>
-          </a:ln>
-          <a:effectLst/>
-        </p:spPr>
-        <p:style>
-          <a:lnRef idx="1">
-            <a:schemeClr val="accent1"/>
-          </a:lnRef>
-          <a:fillRef idx="3">
-            <a:schemeClr val="accent1"/>
-          </a:fillRef>
-          <a:effectRef idx="2">
-            <a:schemeClr val="accent1"/>
-          </a:effectRef>
-          <a:fontRef idx="minor">
-            <a:schemeClr val="lt1"/>
-          </a:fontRef>
-        </p:style>
-        <p:txBody>
-          <a:bodyPr rtlCol="0" anchor="ctr"/>
-          <a:lstStyle/>
-          <a:p/>
-        </p:txBody>
-      </p:sp>
-      <p:sp>
-        <p:nvSpPr>
-          <p:cNvPr id="17427" name="TextBox 17426"/>
-          <p:cNvSpPr txBox="1"/>
-          <p:nvPr/>
-        </p:nvSpPr>
-        <p:spPr>
-          <a:xfrm>
-            <a:off x="566928" y="5029199"/>
-            <a:ext cx="1234440" cy="566928"/>
-          </a:xfrm>
-          <a:prstGeom prst="rect">
-            <a:avLst/>
-          </a:prstGeom>
-          <a:noFill/>
-        </p:spPr>
-        <p:txBody>
-          <a:bodyPr wrap="square" anchor="ctr" lIns="45720" rIns="45720">
-            <a:spAutoFit/>
-          </a:bodyPr>
-          <a:lstStyle/>
-          <a:p>
-            <a:pPr algn="l"/>
-            <a:r>
-              <a:rPr sz="1200" b="1" i="0">
-                <a:solidFill>
-                  <a:srgbClr val="1F3B6E"/>
-                </a:solidFill>
-                <a:latin typeface="Arial"/>
-              </a:rPr>
-              <a:t>Hardware</a:t>
-            </a:r>
-          </a:p>
-        </p:txBody>
-      </p:sp>
-      <p:sp>
-        <p:nvSpPr>
-          <p:cNvPr id="17428" name="TextBox 17427"/>
-          <p:cNvSpPr txBox="1"/>
-          <p:nvPr/>
-        </p:nvSpPr>
-        <p:spPr>
-          <a:xfrm>
-            <a:off x="1783080" y="5029199"/>
-            <a:ext cx="2468880" cy="566928"/>
-          </a:xfrm>
-          <a:prstGeom prst="rect">
-            <a:avLst/>
-          </a:prstGeom>
-          <a:noFill/>
-        </p:spPr>
-        <p:txBody>
-          <a:bodyPr wrap="square" anchor="ctr" lIns="45720" rIns="45720">
-            <a:spAutoFit/>
-          </a:bodyPr>
-          <a:lstStyle/>
-          <a:p>
-            <a:pPr algn="l"/>
-            <a:r>
-              <a:rPr sz="1200" b="0" i="0">
-                <a:solidFill>
-                  <a:srgbClr val="222222"/>
-                </a:solidFill>
-                <a:latin typeface="Arial"/>
-              </a:rPr>
-              <a:t>Runs on a laptop CPU - no GPU needed</a:t>
             </a:r>
           </a:p>
         </p:txBody>
@@ -9200,8 +8658,8 @@
         </p:nvSpPr>
         <p:spPr>
           <a:xfrm>
-            <a:off x="4663440" y="4160520"/>
-            <a:ext cx="7086600" cy="603504"/>
+            <a:off x="4663440" y="4114800"/>
+            <a:ext cx="3017520" cy="658368"/>
           </a:xfrm>
           <a:prstGeom prst="roundRect">
             <a:avLst>
@@ -9233,7 +8691,9 @@
         <p:txBody>
           <a:bodyPr rtlCol="0" anchor="ctr"/>
           <a:lstStyle/>
-          <a:p/>
+          <a:p>
+            <a:pPr algn="ctr"/>
+          </a:p>
         </p:txBody>
       </p:sp>
       <p:sp>
@@ -9244,8 +8704,8 @@
         </p:nvSpPr>
         <p:spPr>
           <a:xfrm>
-            <a:off x="4773168" y="4160520"/>
-            <a:ext cx="1051560" cy="603504"/>
+            <a:off x="4736592" y="4133087"/>
+            <a:ext cx="2880360" cy="640080"/>
           </a:xfrm>
           <a:prstGeom prst="rect">
             <a:avLst/>
@@ -9260,7 +8720,7 @@
           <a:p>
             <a:pPr algn="l"/>
             <a:r>
-              <a:rPr sz="1200" b="1" i="0">
+              <a:rPr sz="1100" b="1">
                 <a:solidFill>
                   <a:srgbClr val="1E8C45"/>
                 </a:solidFill>
@@ -9269,53 +8729,30 @@
               <a:t>Train</a:t>
             </a:r>
           </a:p>
-        </p:txBody>
-      </p:sp>
-      <p:sp>
-        <p:nvSpPr>
-          <p:cNvPr id="17455" name="TextBox 17454"/>
-          <p:cNvSpPr txBox="1"/>
-          <p:nvPr/>
-        </p:nvSpPr>
-        <p:spPr>
-          <a:xfrm>
-            <a:off x="5806440" y="4160520"/>
-            <a:ext cx="5852160" cy="603504"/>
-          </a:xfrm>
-          <a:prstGeom prst="rect">
-            <a:avLst/>
-          </a:prstGeom>
-          <a:noFill/>
-        </p:spPr>
-        <p:txBody>
-          <a:bodyPr wrap="square" anchor="ctr" lIns="45720" rIns="45720">
-            <a:spAutoFit/>
-          </a:bodyPr>
-          <a:lstStyle/>
           <a:p>
             <a:pPr algn="l"/>
             <a:r>
-              <a:rPr sz="1100" b="0" i="0">
+              <a:rPr sz="950" b="0">
                 <a:solidFill>
                   <a:srgbClr val="222222"/>
                 </a:solidFill>
                 <a:latin typeface="Arial"/>
               </a:rPr>
-              <a:t>400 randomised laydowns (no prior intel); GRU learns from hit/miss streams; DQN trained on 250k dwells</a:t>
-            </a:r>
-          </a:p>
-        </p:txBody>
-      </p:sp>
-      <p:sp>
-        <p:nvSpPr>
-          <p:cNvPr id="17456" name="Rounded Rectangle 17455"/>
+              <a:t>400 random battlefields, no prior intel; DQN trained on 250k dwells</a:t>
+            </a:r>
+          </a:p>
+        </p:txBody>
+      </p:sp>
+      <p:sp>
+        <p:nvSpPr>
+          <p:cNvPr id="17455" name="Rounded Rectangle 17454"/>
           <p:cNvSpPr/>
           <p:nvPr/>
         </p:nvSpPr>
         <p:spPr>
           <a:xfrm>
-            <a:off x="4663440" y="4855464"/>
-            <a:ext cx="7086600" cy="603504"/>
+            <a:off x="4663440" y="4828032"/>
+            <a:ext cx="3017520" cy="658368"/>
           </a:xfrm>
           <a:prstGeom prst="roundRect">
             <a:avLst>
@@ -9347,19 +8784,21 @@
         <p:txBody>
           <a:bodyPr rtlCol="0" anchor="ctr"/>
           <a:lstStyle/>
-          <a:p/>
-        </p:txBody>
-      </p:sp>
-      <p:sp>
-        <p:nvSpPr>
-          <p:cNvPr id="17457" name="TextBox 17456"/>
+          <a:p>
+            <a:pPr algn="ctr"/>
+          </a:p>
+        </p:txBody>
+      </p:sp>
+      <p:sp>
+        <p:nvSpPr>
+          <p:cNvPr id="17456" name="TextBox 17455"/>
           <p:cNvSpPr txBox="1"/>
           <p:nvPr/>
         </p:nvSpPr>
         <p:spPr>
           <a:xfrm>
-            <a:off x="4773168" y="4855464"/>
-            <a:ext cx="1051560" cy="603504"/>
+            <a:off x="4736592" y="4846320"/>
+            <a:ext cx="2880360" cy="640080"/>
           </a:xfrm>
           <a:prstGeom prst="rect">
             <a:avLst/>
@@ -9374,7 +8813,7 @@
           <a:p>
             <a:pPr algn="l"/>
             <a:r>
-              <a:rPr sz="1200" b="1" i="0">
+              <a:rPr sz="1100" b="1">
                 <a:solidFill>
                   <a:srgbClr val="1E8C45"/>
                 </a:solidFill>
@@ -9383,53 +8822,30 @@
               <a:t>Validate</a:t>
             </a:r>
           </a:p>
-        </p:txBody>
-      </p:sp>
-      <p:sp>
-        <p:nvSpPr>
-          <p:cNvPr id="17458" name="TextBox 17457"/>
-          <p:cNvSpPr txBox="1"/>
-          <p:nvPr/>
-        </p:nvSpPr>
-        <p:spPr>
-          <a:xfrm>
-            <a:off x="5806440" y="4855464"/>
-            <a:ext cx="5852160" cy="603504"/>
-          </a:xfrm>
-          <a:prstGeom prst="rect">
-            <a:avLst/>
-          </a:prstGeom>
-          <a:noFill/>
-        </p:spPr>
-        <p:txBody>
-          <a:bodyPr wrap="square" anchor="ctr" lIns="45720" rIns="45720">
-            <a:spAutoFit/>
-          </a:bodyPr>
-          <a:lstStyle/>
           <a:p>
             <a:pPr algn="l"/>
             <a:r>
-              <a:rPr sz="1100" b="0" i="0">
+              <a:rPr sz="950" b="0">
                 <a:solidFill>
                   <a:srgbClr val="222222"/>
                 </a:solidFill>
                 <a:latin typeface="Arial"/>
               </a:rPr>
-              <a:t>Benchmark vs round-robin, random sweep, bandit on 30 unseen scenarios + analytic intercept model</a:t>
-            </a:r>
-          </a:p>
-        </p:txBody>
-      </p:sp>
-      <p:sp>
-        <p:nvSpPr>
-          <p:cNvPr id="17459" name="Rounded Rectangle 17458"/>
+              <a:t>30 unseen scenarios vs round-robin, random sweep and bandit</a:t>
+            </a:r>
+          </a:p>
+        </p:txBody>
+      </p:sp>
+      <p:sp>
+        <p:nvSpPr>
+          <p:cNvPr id="17457" name="Rounded Rectangle 17456"/>
           <p:cNvSpPr/>
           <p:nvPr/>
         </p:nvSpPr>
         <p:spPr>
           <a:xfrm>
-            <a:off x="4663440" y="5550407"/>
-            <a:ext cx="7086600" cy="603504"/>
+            <a:off x="4663440" y="5541264"/>
+            <a:ext cx="3017520" cy="658368"/>
           </a:xfrm>
           <a:prstGeom prst="roundRect">
             <a:avLst>
@@ -9461,19 +8877,21 @@
         <p:txBody>
           <a:bodyPr rtlCol="0" anchor="ctr"/>
           <a:lstStyle/>
-          <a:p/>
-        </p:txBody>
-      </p:sp>
-      <p:sp>
-        <p:nvSpPr>
-          <p:cNvPr id="17460" name="TextBox 17459"/>
+          <a:p>
+            <a:pPr algn="ctr"/>
+          </a:p>
+        </p:txBody>
+      </p:sp>
+      <p:sp>
+        <p:nvSpPr>
+          <p:cNvPr id="17458" name="TextBox 17457"/>
           <p:cNvSpPr txBox="1"/>
           <p:nvPr/>
         </p:nvSpPr>
         <p:spPr>
           <a:xfrm>
-            <a:off x="4773168" y="5550407"/>
-            <a:ext cx="1051560" cy="603504"/>
+            <a:off x="4736592" y="5559552"/>
+            <a:ext cx="2880360" cy="640080"/>
           </a:xfrm>
           <a:prstGeom prst="rect">
             <a:avLst/>
@@ -9488,13 +8906,98 @@
           <a:p>
             <a:pPr algn="l"/>
             <a:r>
-              <a:rPr sz="1200" b="1" i="0">
+              <a:rPr sz="1100" b="1">
                 <a:solidFill>
                   <a:srgbClr val="1E8C45"/>
                 </a:solidFill>
                 <a:latin typeface="Arial"/>
               </a:rPr>
               <a:t>Prototype</a:t>
+            </a:r>
+          </a:p>
+          <a:p>
+            <a:pPr algn="l"/>
+            <a:r>
+              <a:rPr sz="950" b="0">
+                <a:solidFill>
+                  <a:srgbClr val="222222"/>
+                </a:solidFill>
+                <a:latin typeface="Arial"/>
+              </a:rPr>
+              <a:t>Working web app (right): live race, annotated graphs, lock-out designer</a:t>
+            </a:r>
+          </a:p>
+        </p:txBody>
+      </p:sp>
+      <p:pic>
+        <p:nvPicPr>
+          <p:cNvPr id="17459" name="Picture 17458" descr="graphA_crop.png"/>
+          <p:cNvPicPr>
+            <a:picLocks noChangeAspect="1"/>
+          </p:cNvPicPr>
+          <p:nvPr/>
+        </p:nvPicPr>
+        <p:blipFill>
+          <a:blip r:embed="rId4"/>
+          <a:stretch>
+            <a:fillRect/>
+          </a:stretch>
+        </p:blipFill>
+        <p:spPr>
+          <a:xfrm>
+            <a:off x="7772400" y="4133087"/>
+            <a:ext cx="3977639" cy="1389795"/>
+          </a:xfrm>
+          <a:prstGeom prst="rect">
+            <a:avLst/>
+          </a:prstGeom>
+          <a:ln w="9525">
+            <a:solidFill>
+              <a:srgbClr val="C9D3E3"/>
+            </a:solidFill>
+          </a:ln>
+        </p:spPr>
+      </p:pic>
+      <p:sp>
+        <p:nvSpPr>
+          <p:cNvPr id="17460" name="TextBox 17459"/>
+          <p:cNvSpPr txBox="1"/>
+          <p:nvPr/>
+        </p:nvSpPr>
+        <p:spPr>
+          <a:xfrm>
+            <a:off x="7772400" y="5559459"/>
+            <a:ext cx="3977639" cy="457200"/>
+          </a:xfrm>
+          <a:prstGeom prst="rect">
+            <a:avLst/>
+          </a:prstGeom>
+          <a:noFill/>
+        </p:spPr>
+        <p:txBody>
+          <a:bodyPr wrap="square" anchor="t" lIns="45720" rIns="45720">
+            <a:spAutoFit/>
+          </a:bodyPr>
+          <a:lstStyle/>
+          <a:p>
+            <a:pPr algn="l"/>
+            <a:r>
+              <a:rPr sz="950" b="1">
+                <a:solidFill>
+                  <a:srgbClr val="1F3B6E"/>
+                </a:solidFill>
+                <a:latin typeface="Arial"/>
+              </a:rPr>
+              <a:t>Live dashboard: </a:t>
+            </a:r>
+            <a:r>
+              <a:rPr sz="950" b="0">
+                <a:solidFill>
+                  <a:srgbClr val="555F6D"/>
+                </a:solidFill>
+                <a:latin typeface="Arial"/>
+              </a:rPr>
+              <a:t>fixed sweep shown as a staircase, with a real catch and a real miss called out</a:t>
             </a:r>
           </a:p>
         </p:txBody>
@@ -9507,8 +9010,8 @@
         </p:nvSpPr>
         <p:spPr>
           <a:xfrm>
-            <a:off x="5806440" y="5550407"/>
-            <a:ext cx="5852160" cy="603504"/>
+            <a:off x="10776992" y="200248"/>
+            <a:ext cx="1280160" cy="914400"/>
           </a:xfrm>
           <a:prstGeom prst="rect">
             <a:avLst/>
@@ -9516,20 +9019,932 @@
           <a:noFill/>
         </p:spPr>
         <p:txBody>
-          <a:bodyPr wrap="square" anchor="ctr" lIns="45720" rIns="45720">
+          <a:bodyPr wrap="none" lIns="0" rIns="0" tIns="0" bIns="0">
             <a:spAutoFit/>
           </a:bodyPr>
           <a:lstStyle/>
           <a:p>
-            <a:pPr algn="l"/>
-            <a:r>
-              <a:rPr sz="1100" b="0" i="0">
+            <a:pPr algn="ctr">
+              <a:lnSpc>
+                <a:spcPct val="95000"/>
+              </a:lnSpc>
+            </a:pPr>
+            <a:r>
+              <a:rPr sz="1400" b="1">
+                <a:solidFill>
+                  <a:srgbClr val="415861"/>
+                </a:solidFill>
+                <a:latin typeface="Arial"/>
+              </a:rPr>
+              <a:t>SMART INDIA</a:t>
+            </a:r>
+          </a:p>
+          <a:p>
+            <a:pPr algn="ctr">
+              <a:lnSpc>
+                <a:spcPct val="95000"/>
+              </a:lnSpc>
+            </a:pPr>
+            <a:r>
+              <a:rPr sz="1400" b="1">
+                <a:solidFill>
+                  <a:srgbClr val="415861"/>
+                </a:solidFill>
+                <a:latin typeface="Arial"/>
+              </a:rPr>
+              <a:t>HACKATHON</a:t>
+            </a:r>
+          </a:p>
+          <a:p>
+            <a:pPr algn="ctr">
+              <a:lnSpc>
+                <a:spcPct val="95000"/>
+              </a:lnSpc>
+            </a:pPr>
+            <a:r>
+              <a:rPr sz="1400" b="1">
+                <a:solidFill>
+                  <a:srgbClr val="415861"/>
+                </a:solidFill>
+                <a:latin typeface="Arial"/>
+              </a:rPr>
+              <a:t>2026</a:t>
+            </a:r>
+          </a:p>
+        </p:txBody>
+      </p:sp>
+      <p:sp>
+        <p:nvSpPr>
+          <p:cNvPr id="17462" name="Rounded Rectangle 17461"/>
+          <p:cNvSpPr/>
+          <p:nvPr/>
+        </p:nvSpPr>
+        <p:spPr>
+          <a:xfrm>
+            <a:off x="457200" y="1737360"/>
+            <a:ext cx="3840480" cy="566928"/>
+          </a:xfrm>
+          <a:prstGeom prst="roundRect">
+            <a:avLst>
+              <a:gd name="adj" fmla="val 8000"/>
+            </a:avLst>
+          </a:prstGeom>
+          <a:solidFill>
+            <a:srgbClr val="EEF3FA"/>
+          </a:solidFill>
+          <a:ln>
+            <a:noFill/>
+          </a:ln>
+          <a:effectLst/>
+        </p:spPr>
+        <p:style>
+          <a:lnRef idx="1">
+            <a:schemeClr val="accent1"/>
+          </a:lnRef>
+          <a:fillRef idx="3">
+            <a:schemeClr val="accent1"/>
+          </a:fillRef>
+          <a:effectRef idx="2">
+            <a:schemeClr val="accent1"/>
+          </a:effectRef>
+          <a:fontRef idx="minor">
+            <a:schemeClr val="lt1"/>
+          </a:fontRef>
+        </p:style>
+        <p:txBody>
+          <a:bodyPr rtlCol="0" anchor="ctr"/>
+          <a:lstStyle/>
+          <a:p>
+            <a:pPr algn="ctr"/>
+          </a:p>
+        </p:txBody>
+      </p:sp>
+      <p:sp>
+        <p:nvSpPr>
+          <p:cNvPr id="17463" name="TextBox 17462"/>
+          <p:cNvSpPr txBox="1"/>
+          <p:nvPr/>
+        </p:nvSpPr>
+        <p:spPr>
+          <a:xfrm>
+            <a:off x="548640" y="1737360"/>
+            <a:ext cx="1097280" cy="566928"/>
+          </a:xfrm>
+          <a:prstGeom prst="rect">
+            <a:avLst/>
+          </a:prstGeom>
+          <a:noFill/>
+        </p:spPr>
+        <p:txBody>
+          <a:bodyPr wrap="square" anchor="ctr" lIns="27432" rIns="27432" tIns="27432" bIns="27432">
+            <a:spAutoFit/>
+          </a:bodyPr>
+          <a:lstStyle/>
+          <a:p>
+            <a:r>
+              <a:rPr sz="1150" b="1">
+                <a:solidFill>
+                  <a:srgbClr val="1F3B6E"/>
+                </a:solidFill>
+                <a:latin typeface="Arial"/>
+              </a:rPr>
+              <a:t>Language</a:t>
+            </a:r>
+          </a:p>
+        </p:txBody>
+      </p:sp>
+      <p:sp>
+        <p:nvSpPr>
+          <p:cNvPr id="17464" name="TextBox 17463"/>
+          <p:cNvSpPr txBox="1"/>
+          <p:nvPr/>
+        </p:nvSpPr>
+        <p:spPr>
+          <a:xfrm>
+            <a:off x="1600200" y="1737360"/>
+            <a:ext cx="1828800" cy="566928"/>
+          </a:xfrm>
+          <a:prstGeom prst="rect">
+            <a:avLst/>
+          </a:prstGeom>
+          <a:noFill/>
+        </p:spPr>
+        <p:txBody>
+          <a:bodyPr wrap="square" anchor="ctr" lIns="27432" rIns="27432" tIns="27432" bIns="27432">
+            <a:spAutoFit/>
+          </a:bodyPr>
+          <a:lstStyle/>
+          <a:p>
+            <a:r>
+              <a:rPr sz="1100" b="0">
                 <a:solidFill>
                   <a:srgbClr val="222222"/>
                 </a:solidFill>
                 <a:latin typeface="Arial"/>
               </a:rPr>
-              <a:t>Working web app: live band×time waterfall, A/B scheduler race, periodic-intercept designer</a:t>
+              <a:t>Python 3.11, JavaScript</a:t>
+            </a:r>
+          </a:p>
+        </p:txBody>
+      </p:sp>
+      <p:pic>
+        <p:nvPicPr>
+          <p:cNvPr id="17465" name="Picture 17464" descr="javascript-original.png"/>
+          <p:cNvPicPr>
+            <a:picLocks noChangeAspect="1"/>
+          </p:cNvPicPr>
+          <p:nvPr/>
+        </p:nvPicPr>
+        <p:blipFill>
+          <a:blip r:embed="rId5"/>
+          <a:stretch>
+            <a:fillRect/>
+          </a:stretch>
+        </p:blipFill>
+        <p:spPr>
+          <a:xfrm>
+            <a:off x="3840480" y="1837943"/>
+            <a:ext cx="365760" cy="365760"/>
+          </a:xfrm>
+          <a:prstGeom prst="rect">
+            <a:avLst/>
+          </a:prstGeom>
+        </p:spPr>
+      </p:pic>
+      <p:pic>
+        <p:nvPicPr>
+          <p:cNvPr id="17466" name="Picture 17465" descr="python-original.png"/>
+          <p:cNvPicPr>
+            <a:picLocks noChangeAspect="1"/>
+          </p:cNvPicPr>
+          <p:nvPr/>
+        </p:nvPicPr>
+        <p:blipFill>
+          <a:blip r:embed="rId6"/>
+          <a:stretch>
+            <a:fillRect/>
+          </a:stretch>
+        </p:blipFill>
+        <p:spPr>
+          <a:xfrm>
+            <a:off x="3437629" y="1837943"/>
+            <a:ext cx="329699" cy="365760"/>
+          </a:xfrm>
+          <a:prstGeom prst="rect">
+            <a:avLst/>
+          </a:prstGeom>
+        </p:spPr>
+      </p:pic>
+      <p:sp>
+        <p:nvSpPr>
+          <p:cNvPr id="17467" name="Rounded Rectangle 17466"/>
+          <p:cNvSpPr/>
+          <p:nvPr/>
+        </p:nvSpPr>
+        <p:spPr>
+          <a:xfrm>
+            <a:off x="457200" y="2395728"/>
+            <a:ext cx="3840480" cy="566928"/>
+          </a:xfrm>
+          <a:prstGeom prst="roundRect">
+            <a:avLst>
+              <a:gd name="adj" fmla="val 8000"/>
+            </a:avLst>
+          </a:prstGeom>
+          <a:solidFill>
+            <a:srgbClr val="EEF3FA"/>
+          </a:solidFill>
+          <a:ln>
+            <a:noFill/>
+          </a:ln>
+          <a:effectLst/>
+        </p:spPr>
+        <p:style>
+          <a:lnRef idx="1">
+            <a:schemeClr val="accent1"/>
+          </a:lnRef>
+          <a:fillRef idx="3">
+            <a:schemeClr val="accent1"/>
+          </a:fillRef>
+          <a:effectRef idx="2">
+            <a:schemeClr val="accent1"/>
+          </a:effectRef>
+          <a:fontRef idx="minor">
+            <a:schemeClr val="lt1"/>
+          </a:fontRef>
+        </p:style>
+        <p:txBody>
+          <a:bodyPr rtlCol="0" anchor="ctr"/>
+          <a:lstStyle/>
+          <a:p>
+            <a:pPr algn="ctr"/>
+          </a:p>
+        </p:txBody>
+      </p:sp>
+      <p:sp>
+        <p:nvSpPr>
+          <p:cNvPr id="17468" name="TextBox 17467"/>
+          <p:cNvSpPr txBox="1"/>
+          <p:nvPr/>
+        </p:nvSpPr>
+        <p:spPr>
+          <a:xfrm>
+            <a:off x="548640" y="2395728"/>
+            <a:ext cx="1097280" cy="566928"/>
+          </a:xfrm>
+          <a:prstGeom prst="rect">
+            <a:avLst/>
+          </a:prstGeom>
+          <a:noFill/>
+        </p:spPr>
+        <p:txBody>
+          <a:bodyPr wrap="square" anchor="ctr" lIns="27432" rIns="27432" tIns="27432" bIns="27432">
+            <a:spAutoFit/>
+          </a:bodyPr>
+          <a:lstStyle/>
+          <a:p>
+            <a:r>
+              <a:rPr sz="1150" b="1">
+                <a:solidFill>
+                  <a:srgbClr val="1F3B6E"/>
+                </a:solidFill>
+                <a:latin typeface="Arial"/>
+              </a:rPr>
+              <a:t>AI / ML</a:t>
+            </a:r>
+          </a:p>
+        </p:txBody>
+      </p:sp>
+      <p:sp>
+        <p:nvSpPr>
+          <p:cNvPr id="17469" name="TextBox 17468"/>
+          <p:cNvSpPr txBox="1"/>
+          <p:nvPr/>
+        </p:nvSpPr>
+        <p:spPr>
+          <a:xfrm>
+            <a:off x="1600200" y="2395728"/>
+            <a:ext cx="1828800" cy="566928"/>
+          </a:xfrm>
+          <a:prstGeom prst="rect">
+            <a:avLst/>
+          </a:prstGeom>
+          <a:noFill/>
+        </p:spPr>
+        <p:txBody>
+          <a:bodyPr wrap="square" anchor="ctr" lIns="27432" rIns="27432" tIns="27432" bIns="27432">
+            <a:spAutoFit/>
+          </a:bodyPr>
+          <a:lstStyle/>
+          <a:p>
+            <a:r>
+              <a:rPr sz="1100" b="0">
+                <a:solidFill>
+                  <a:srgbClr val="222222"/>
+                </a:solidFill>
+                <a:latin typeface="Arial"/>
+              </a:rPr>
+              <a:t>PyTorch: GRU predictor, Double-DQN</a:t>
+            </a:r>
+          </a:p>
+        </p:txBody>
+      </p:sp>
+      <p:pic>
+        <p:nvPicPr>
+          <p:cNvPr id="17470" name="Picture 17469" descr="pytorch-original.png"/>
+          <p:cNvPicPr>
+            <a:picLocks noChangeAspect="1"/>
+          </p:cNvPicPr>
+          <p:nvPr/>
+        </p:nvPicPr>
+        <p:blipFill>
+          <a:blip r:embed="rId7"/>
+          <a:stretch>
+            <a:fillRect/>
+          </a:stretch>
+        </p:blipFill>
+        <p:spPr>
+          <a:xfrm>
+            <a:off x="3902697" y="2496312"/>
+            <a:ext cx="303543" cy="365760"/>
+          </a:xfrm>
+          <a:prstGeom prst="rect">
+            <a:avLst/>
+          </a:prstGeom>
+        </p:spPr>
+      </p:pic>
+      <p:sp>
+        <p:nvSpPr>
+          <p:cNvPr id="17471" name="Rounded Rectangle 17470"/>
+          <p:cNvSpPr/>
+          <p:nvPr/>
+        </p:nvSpPr>
+        <p:spPr>
+          <a:xfrm>
+            <a:off x="457200" y="3054096"/>
+            <a:ext cx="3840480" cy="566928"/>
+          </a:xfrm>
+          <a:prstGeom prst="roundRect">
+            <a:avLst>
+              <a:gd name="adj" fmla="val 8000"/>
+            </a:avLst>
+          </a:prstGeom>
+          <a:solidFill>
+            <a:srgbClr val="EEF3FA"/>
+          </a:solidFill>
+          <a:ln>
+            <a:noFill/>
+          </a:ln>
+          <a:effectLst/>
+        </p:spPr>
+        <p:style>
+          <a:lnRef idx="1">
+            <a:schemeClr val="accent1"/>
+          </a:lnRef>
+          <a:fillRef idx="3">
+            <a:schemeClr val="accent1"/>
+          </a:fillRef>
+          <a:effectRef idx="2">
+            <a:schemeClr val="accent1"/>
+          </a:effectRef>
+          <a:fontRef idx="minor">
+            <a:schemeClr val="lt1"/>
+          </a:fontRef>
+        </p:style>
+        <p:txBody>
+          <a:bodyPr rtlCol="0" anchor="ctr"/>
+          <a:lstStyle/>
+          <a:p>
+            <a:pPr algn="ctr"/>
+          </a:p>
+        </p:txBody>
+      </p:sp>
+      <p:sp>
+        <p:nvSpPr>
+          <p:cNvPr id="17472" name="TextBox 17471"/>
+          <p:cNvSpPr txBox="1"/>
+          <p:nvPr/>
+        </p:nvSpPr>
+        <p:spPr>
+          <a:xfrm>
+            <a:off x="548640" y="3054096"/>
+            <a:ext cx="1097280" cy="566928"/>
+          </a:xfrm>
+          <a:prstGeom prst="rect">
+            <a:avLst/>
+          </a:prstGeom>
+          <a:noFill/>
+        </p:spPr>
+        <p:txBody>
+          <a:bodyPr wrap="square" anchor="ctr" lIns="27432" rIns="27432" tIns="27432" bIns="27432">
+            <a:spAutoFit/>
+          </a:bodyPr>
+          <a:lstStyle/>
+          <a:p>
+            <a:r>
+              <a:rPr sz="1150" b="1">
+                <a:solidFill>
+                  <a:srgbClr val="1F3B6E"/>
+                </a:solidFill>
+                <a:latin typeface="Arial"/>
+              </a:rPr>
+              <a:t>Signal model</a:t>
+            </a:r>
+          </a:p>
+        </p:txBody>
+      </p:sp>
+      <p:sp>
+        <p:nvSpPr>
+          <p:cNvPr id="17473" name="TextBox 17472"/>
+          <p:cNvSpPr txBox="1"/>
+          <p:nvPr/>
+        </p:nvSpPr>
+        <p:spPr>
+          <a:xfrm>
+            <a:off x="1600200" y="3054096"/>
+            <a:ext cx="1828800" cy="566928"/>
+          </a:xfrm>
+          <a:prstGeom prst="rect">
+            <a:avLst/>
+          </a:prstGeom>
+          <a:noFill/>
+        </p:spPr>
+        <p:txBody>
+          <a:bodyPr wrap="square" anchor="ctr" lIns="27432" rIns="27432" tIns="27432" bIns="27432">
+            <a:spAutoFit/>
+          </a:bodyPr>
+          <a:lstStyle/>
+          <a:p>
+            <a:r>
+              <a:rPr sz="1100" b="0">
+                <a:solidFill>
+                  <a:srgbClr val="222222"/>
+                </a:solidFill>
+                <a:latin typeface="Arial"/>
+              </a:rPr>
+              <a:t>NumPy, SciPy (energy detector)</a:t>
+            </a:r>
+          </a:p>
+        </p:txBody>
+      </p:sp>
+      <p:pic>
+        <p:nvPicPr>
+          <p:cNvPr id="17474" name="Picture 17473" descr="scipy.png"/>
+          <p:cNvPicPr>
+            <a:picLocks noChangeAspect="1"/>
+          </p:cNvPicPr>
+          <p:nvPr/>
+        </p:nvPicPr>
+        <p:blipFill>
+          <a:blip r:embed="rId8"/>
+          <a:stretch>
+            <a:fillRect/>
+          </a:stretch>
+        </p:blipFill>
+        <p:spPr>
+          <a:xfrm>
+            <a:off x="3817134" y="3154679"/>
+            <a:ext cx="389106" cy="365760"/>
+          </a:xfrm>
+          <a:prstGeom prst="rect">
+            <a:avLst/>
+          </a:prstGeom>
+        </p:spPr>
+      </p:pic>
+      <p:pic>
+        <p:nvPicPr>
+          <p:cNvPr id="17475" name="Picture 17474" descr="numpy-original.png"/>
+          <p:cNvPicPr>
+            <a:picLocks noChangeAspect="1"/>
+          </p:cNvPicPr>
+          <p:nvPr/>
+        </p:nvPicPr>
+        <p:blipFill>
+          <a:blip r:embed="rId9"/>
+          <a:stretch>
+            <a:fillRect/>
+          </a:stretch>
+        </p:blipFill>
+        <p:spPr>
+          <a:xfrm>
+            <a:off x="3400168" y="3154679"/>
+            <a:ext cx="343814" cy="365760"/>
+          </a:xfrm>
+          <a:prstGeom prst="rect">
+            <a:avLst/>
+          </a:prstGeom>
+        </p:spPr>
+      </p:pic>
+      <p:sp>
+        <p:nvSpPr>
+          <p:cNvPr id="17476" name="Rounded Rectangle 17475"/>
+          <p:cNvSpPr/>
+          <p:nvPr/>
+        </p:nvSpPr>
+        <p:spPr>
+          <a:xfrm>
+            <a:off x="457200" y="3712463"/>
+            <a:ext cx="3840480" cy="566928"/>
+          </a:xfrm>
+          <a:prstGeom prst="roundRect">
+            <a:avLst>
+              <a:gd name="adj" fmla="val 8000"/>
+            </a:avLst>
+          </a:prstGeom>
+          <a:solidFill>
+            <a:srgbClr val="EEF3FA"/>
+          </a:solidFill>
+          <a:ln>
+            <a:noFill/>
+          </a:ln>
+          <a:effectLst/>
+        </p:spPr>
+        <p:style>
+          <a:lnRef idx="1">
+            <a:schemeClr val="accent1"/>
+          </a:lnRef>
+          <a:fillRef idx="3">
+            <a:schemeClr val="accent1"/>
+          </a:fillRef>
+          <a:effectRef idx="2">
+            <a:schemeClr val="accent1"/>
+          </a:effectRef>
+          <a:fontRef idx="minor">
+            <a:schemeClr val="lt1"/>
+          </a:fontRef>
+        </p:style>
+        <p:txBody>
+          <a:bodyPr rtlCol="0" anchor="ctr"/>
+          <a:lstStyle/>
+          <a:p>
+            <a:pPr algn="ctr"/>
+          </a:p>
+        </p:txBody>
+      </p:sp>
+      <p:sp>
+        <p:nvSpPr>
+          <p:cNvPr id="17477" name="TextBox 17476"/>
+          <p:cNvSpPr txBox="1"/>
+          <p:nvPr/>
+        </p:nvSpPr>
+        <p:spPr>
+          <a:xfrm>
+            <a:off x="548640" y="3712463"/>
+            <a:ext cx="1097280" cy="566928"/>
+          </a:xfrm>
+          <a:prstGeom prst="rect">
+            <a:avLst/>
+          </a:prstGeom>
+          <a:noFill/>
+        </p:spPr>
+        <p:txBody>
+          <a:bodyPr wrap="square" anchor="ctr" lIns="27432" rIns="27432" tIns="27432" bIns="27432">
+            <a:spAutoFit/>
+          </a:bodyPr>
+          <a:lstStyle/>
+          <a:p>
+            <a:r>
+              <a:rPr sz="1150" b="1">
+                <a:solidFill>
+                  <a:srgbClr val="1F3B6E"/>
+                </a:solidFill>
+                <a:latin typeface="Arial"/>
+              </a:rPr>
+              <a:t>Backend</a:t>
+            </a:r>
+          </a:p>
+        </p:txBody>
+      </p:sp>
+      <p:sp>
+        <p:nvSpPr>
+          <p:cNvPr id="17478" name="TextBox 17477"/>
+          <p:cNvSpPr txBox="1"/>
+          <p:nvPr/>
+        </p:nvSpPr>
+        <p:spPr>
+          <a:xfrm>
+            <a:off x="1600200" y="3712463"/>
+            <a:ext cx="1828800" cy="566928"/>
+          </a:xfrm>
+          <a:prstGeom prst="rect">
+            <a:avLst/>
+          </a:prstGeom>
+          <a:noFill/>
+        </p:spPr>
+        <p:txBody>
+          <a:bodyPr wrap="square" anchor="ctr" lIns="27432" rIns="27432" tIns="27432" bIns="27432">
+            <a:spAutoFit/>
+          </a:bodyPr>
+          <a:lstStyle/>
+          <a:p>
+            <a:r>
+              <a:rPr sz="1100" b="0">
+                <a:solidFill>
+                  <a:srgbClr val="222222"/>
+                </a:solidFill>
+                <a:latin typeface="Arial"/>
+              </a:rPr>
+              <a:t>FastAPI (REST API)</a:t>
+            </a:r>
+          </a:p>
+        </p:txBody>
+      </p:sp>
+      <p:pic>
+        <p:nvPicPr>
+          <p:cNvPr id="17479" name="Picture 17478" descr="fastapi-original.png"/>
+          <p:cNvPicPr>
+            <a:picLocks noChangeAspect="1"/>
+          </p:cNvPicPr>
+          <p:nvPr/>
+        </p:nvPicPr>
+        <p:blipFill>
+          <a:blip r:embed="rId10"/>
+          <a:stretch>
+            <a:fillRect/>
+          </a:stretch>
+        </p:blipFill>
+        <p:spPr>
+          <a:xfrm>
+            <a:off x="3840480" y="3813048"/>
+            <a:ext cx="365760" cy="365760"/>
+          </a:xfrm>
+          <a:prstGeom prst="rect">
+            <a:avLst/>
+          </a:prstGeom>
+        </p:spPr>
+      </p:pic>
+      <p:sp>
+        <p:nvSpPr>
+          <p:cNvPr id="17480" name="Rounded Rectangle 17479"/>
+          <p:cNvSpPr/>
+          <p:nvPr/>
+        </p:nvSpPr>
+        <p:spPr>
+          <a:xfrm>
+            <a:off x="457200" y="4370831"/>
+            <a:ext cx="3840480" cy="566928"/>
+          </a:xfrm>
+          <a:prstGeom prst="roundRect">
+            <a:avLst>
+              <a:gd name="adj" fmla="val 8000"/>
+            </a:avLst>
+          </a:prstGeom>
+          <a:solidFill>
+            <a:srgbClr val="EEF3FA"/>
+          </a:solidFill>
+          <a:ln>
+            <a:noFill/>
+          </a:ln>
+          <a:effectLst/>
+        </p:spPr>
+        <p:style>
+          <a:lnRef idx="1">
+            <a:schemeClr val="accent1"/>
+          </a:lnRef>
+          <a:fillRef idx="3">
+            <a:schemeClr val="accent1"/>
+          </a:fillRef>
+          <a:effectRef idx="2">
+            <a:schemeClr val="accent1"/>
+          </a:effectRef>
+          <a:fontRef idx="minor">
+            <a:schemeClr val="lt1"/>
+          </a:fontRef>
+        </p:style>
+        <p:txBody>
+          <a:bodyPr rtlCol="0" anchor="ctr"/>
+          <a:lstStyle/>
+          <a:p>
+            <a:pPr algn="ctr"/>
+          </a:p>
+        </p:txBody>
+      </p:sp>
+      <p:sp>
+        <p:nvSpPr>
+          <p:cNvPr id="17481" name="TextBox 17480"/>
+          <p:cNvSpPr txBox="1"/>
+          <p:nvPr/>
+        </p:nvSpPr>
+        <p:spPr>
+          <a:xfrm>
+            <a:off x="548640" y="4370831"/>
+            <a:ext cx="1097280" cy="566928"/>
+          </a:xfrm>
+          <a:prstGeom prst="rect">
+            <a:avLst/>
+          </a:prstGeom>
+          <a:noFill/>
+        </p:spPr>
+        <p:txBody>
+          <a:bodyPr wrap="square" anchor="ctr" lIns="27432" rIns="27432" tIns="27432" bIns="27432">
+            <a:spAutoFit/>
+          </a:bodyPr>
+          <a:lstStyle/>
+          <a:p>
+            <a:r>
+              <a:rPr sz="1150" b="1">
+                <a:solidFill>
+                  <a:srgbClr val="1F3B6E"/>
+                </a:solidFill>
+                <a:latin typeface="Arial"/>
+              </a:rPr>
+              <a:t>Frontend</a:t>
+            </a:r>
+          </a:p>
+        </p:txBody>
+      </p:sp>
+      <p:sp>
+        <p:nvSpPr>
+          <p:cNvPr id="17482" name="TextBox 17481"/>
+          <p:cNvSpPr txBox="1"/>
+          <p:nvPr/>
+        </p:nvSpPr>
+        <p:spPr>
+          <a:xfrm>
+            <a:off x="1600200" y="4370831"/>
+            <a:ext cx="1828800" cy="566928"/>
+          </a:xfrm>
+          <a:prstGeom prst="rect">
+            <a:avLst/>
+          </a:prstGeom>
+          <a:noFill/>
+        </p:spPr>
+        <p:txBody>
+          <a:bodyPr wrap="square" anchor="ctr" lIns="27432" rIns="27432" tIns="27432" bIns="27432">
+            <a:spAutoFit/>
+          </a:bodyPr>
+          <a:lstStyle/>
+          <a:p>
+            <a:r>
+              <a:rPr sz="1100" b="0">
+                <a:solidFill>
+                  <a:srgbClr val="222222"/>
+                </a:solidFill>
+                <a:latin typeface="Arial"/>
+              </a:rPr>
+              <a:t>HTML5 + Chart.js dashboard</a:t>
+            </a:r>
+          </a:p>
+        </p:txBody>
+      </p:sp>
+      <p:pic>
+        <p:nvPicPr>
+          <p:cNvPr id="17483" name="Picture 17482" descr="chartdotjs.png"/>
+          <p:cNvPicPr>
+            <a:picLocks noChangeAspect="1"/>
+          </p:cNvPicPr>
+          <p:nvPr/>
+        </p:nvPicPr>
+        <p:blipFill>
+          <a:blip r:embed="rId11"/>
+          <a:stretch>
+            <a:fillRect/>
+          </a:stretch>
+        </p:blipFill>
+        <p:spPr>
+          <a:xfrm>
+            <a:off x="3888029" y="4471416"/>
+            <a:ext cx="318211" cy="365760"/>
+          </a:xfrm>
+          <a:prstGeom prst="rect">
+            <a:avLst/>
+          </a:prstGeom>
+        </p:spPr>
+      </p:pic>
+      <p:pic>
+        <p:nvPicPr>
+          <p:cNvPr id="17484" name="Picture 17483" descr="html5-original.png"/>
+          <p:cNvPicPr>
+            <a:picLocks noChangeAspect="1"/>
+          </p:cNvPicPr>
+          <p:nvPr/>
+        </p:nvPicPr>
+        <p:blipFill>
+          <a:blip r:embed="rId12"/>
+          <a:stretch>
+            <a:fillRect/>
+          </a:stretch>
+        </p:blipFill>
+        <p:spPr>
+          <a:xfrm>
+            <a:off x="3492257" y="4471416"/>
+            <a:ext cx="322619" cy="365760"/>
+          </a:xfrm>
+          <a:prstGeom prst="rect">
+            <a:avLst/>
+          </a:prstGeom>
+        </p:spPr>
+      </p:pic>
+      <p:sp>
+        <p:nvSpPr>
+          <p:cNvPr id="17485" name="Rounded Rectangle 17484"/>
+          <p:cNvSpPr/>
+          <p:nvPr/>
+        </p:nvSpPr>
+        <p:spPr>
+          <a:xfrm>
+            <a:off x="457200" y="5029199"/>
+            <a:ext cx="3840480" cy="566928"/>
+          </a:xfrm>
+          <a:prstGeom prst="roundRect">
+            <a:avLst>
+              <a:gd name="adj" fmla="val 8000"/>
+            </a:avLst>
+          </a:prstGeom>
+          <a:solidFill>
+            <a:srgbClr val="EEF3FA"/>
+          </a:solidFill>
+          <a:ln>
+            <a:noFill/>
+          </a:ln>
+          <a:effectLst/>
+        </p:spPr>
+        <p:style>
+          <a:lnRef idx="1">
+            <a:schemeClr val="accent1"/>
+          </a:lnRef>
+          <a:fillRef idx="3">
+            <a:schemeClr val="accent1"/>
+          </a:fillRef>
+          <a:effectRef idx="2">
+            <a:schemeClr val="accent1"/>
+          </a:effectRef>
+          <a:fontRef idx="minor">
+            <a:schemeClr val="lt1"/>
+          </a:fontRef>
+        </p:style>
+        <p:txBody>
+          <a:bodyPr rtlCol="0" anchor="ctr"/>
+          <a:lstStyle/>
+          <a:p>
+            <a:pPr algn="ctr"/>
+          </a:p>
+        </p:txBody>
+      </p:sp>
+      <p:sp>
+        <p:nvSpPr>
+          <p:cNvPr id="17486" name="TextBox 17485"/>
+          <p:cNvSpPr txBox="1"/>
+          <p:nvPr/>
+        </p:nvSpPr>
+        <p:spPr>
+          <a:xfrm>
+            <a:off x="548640" y="5029199"/>
+            <a:ext cx="1097280" cy="566928"/>
+          </a:xfrm>
+          <a:prstGeom prst="rect">
+            <a:avLst/>
+          </a:prstGeom>
+          <a:noFill/>
+        </p:spPr>
+        <p:txBody>
+          <a:bodyPr wrap="square" anchor="ctr" lIns="27432" rIns="27432" tIns="27432" bIns="27432">
+            <a:spAutoFit/>
+          </a:bodyPr>
+          <a:lstStyle/>
+          <a:p>
+            <a:r>
+              <a:rPr sz="1150" b="1">
+                <a:solidFill>
+                  <a:srgbClr val="1F3B6E"/>
+                </a:solidFill>
+                <a:latin typeface="Arial"/>
+              </a:rPr>
+              <a:t>Hardware</a:t>
+            </a:r>
+          </a:p>
+        </p:txBody>
+      </p:sp>
+      <p:sp>
+        <p:nvSpPr>
+          <p:cNvPr id="17487" name="TextBox 17486"/>
+          <p:cNvSpPr txBox="1"/>
+          <p:nvPr/>
+        </p:nvSpPr>
+        <p:spPr>
+          <a:xfrm>
+            <a:off x="1600200" y="5029199"/>
+            <a:ext cx="2651760" cy="566928"/>
+          </a:xfrm>
+          <a:prstGeom prst="rect">
+            <a:avLst/>
+          </a:prstGeom>
+          <a:noFill/>
+        </p:spPr>
+        <p:txBody>
+          <a:bodyPr wrap="square" anchor="ctr" lIns="27432" rIns="27432" tIns="27432" bIns="27432">
+            <a:spAutoFit/>
+          </a:bodyPr>
+          <a:lstStyle/>
+          <a:p>
+            <a:r>
+              <a:rPr sz="1100" b="0">
+                <a:solidFill>
+                  <a:srgbClr val="222222"/>
+                </a:solidFill>
+                <a:latin typeface="Arial"/>
+              </a:rPr>
+              <a:t>Runs on a laptop CPU, no GPU needed</a:t>
             </a:r>
           </a:p>
         </p:txBody>
@@ -9829,13 +10244,13 @@
           <a:blip r:embed="rId3">
             <a:alphaModFix/>
           </a:blip>
-          <a:srcRect/>
+          <a:srcRect r="57500"/>
           <a:stretch/>
         </p:blipFill>
         <p:spPr>
           <a:xfrm>
             <a:off x="9803911" y="81376"/>
-            <a:ext cx="2246575" cy="1149075"/>
+            <a:ext cx="954794" cy="1149075"/>
           </a:xfrm>
           <a:prstGeom prst="rect">
             <a:avLst/>
@@ -9891,7 +10306,7 @@
             <a:pPr algn="ctr"/>
             <a:r>
               <a:rPr lang="en-US" dirty="0"/>
-              <a:t>Your Team Name</a:t>
+              <a:t>Out of Bounds</a:t>
             </a:r>
             <a:endParaRPr lang="en-IN" dirty="0"/>
           </a:p>
@@ -10541,6 +10956,77 @@
           </a:graphicData>
         </a:graphic>
       </p:graphicFrame>
+      <p:sp>
+        <p:nvSpPr>
+          <p:cNvPr id="17420" name="TextBox 17419"/>
+          <p:cNvSpPr txBox="1"/>
+          <p:nvPr/>
+        </p:nvSpPr>
+        <p:spPr>
+          <a:xfrm>
+            <a:off x="10776992" y="200248"/>
+            <a:ext cx="1280160" cy="914400"/>
+          </a:xfrm>
+          <a:prstGeom prst="rect">
+            <a:avLst/>
+          </a:prstGeom>
+          <a:noFill/>
+        </p:spPr>
+        <p:txBody>
+          <a:bodyPr wrap="none" lIns="0" rIns="0" tIns="0" bIns="0">
+            <a:spAutoFit/>
+          </a:bodyPr>
+          <a:lstStyle/>
+          <a:p>
+            <a:pPr algn="ctr">
+              <a:lnSpc>
+                <a:spcPct val="95000"/>
+              </a:lnSpc>
+            </a:pPr>
+            <a:r>
+              <a:rPr sz="1400" b="1">
+                <a:solidFill>
+                  <a:srgbClr val="415861"/>
+                </a:solidFill>
+                <a:latin typeface="Arial"/>
+              </a:rPr>
+              <a:t>SMART INDIA</a:t>
+            </a:r>
+          </a:p>
+          <a:p>
+            <a:pPr algn="ctr">
+              <a:lnSpc>
+                <a:spcPct val="95000"/>
+              </a:lnSpc>
+            </a:pPr>
+            <a:r>
+              <a:rPr sz="1400" b="1">
+                <a:solidFill>
+                  <a:srgbClr val="415861"/>
+                </a:solidFill>
+                <a:latin typeface="Arial"/>
+              </a:rPr>
+              <a:t>HACKATHON</a:t>
+            </a:r>
+          </a:p>
+          <a:p>
+            <a:pPr algn="ctr">
+              <a:lnSpc>
+                <a:spcPct val="95000"/>
+              </a:lnSpc>
+            </a:pPr>
+            <a:r>
+              <a:rPr sz="1400" b="1">
+                <a:solidFill>
+                  <a:srgbClr val="415861"/>
+                </a:solidFill>
+                <a:latin typeface="Arial"/>
+              </a:rPr>
+              <a:t>2026</a:t>
+            </a:r>
+          </a:p>
+        </p:txBody>
+      </p:sp>
     </p:spTree>
     <p:extLst>
       <p:ext uri="{BB962C8B-B14F-4D97-AF65-F5344CB8AC3E}">
@@ -10841,13 +11327,13 @@
           <a:blip r:embed="rId3">
             <a:alphaModFix/>
           </a:blip>
-          <a:srcRect/>
+          <a:srcRect r="57500"/>
           <a:stretch/>
         </p:blipFill>
         <p:spPr>
           <a:xfrm>
             <a:off x="9803911" y="81376"/>
-            <a:ext cx="2246575" cy="1149075"/>
+            <a:ext cx="954794" cy="1149075"/>
           </a:xfrm>
           <a:prstGeom prst="rect">
             <a:avLst/>
@@ -10903,7 +11389,7 @@
             <a:pPr algn="ctr"/>
             <a:r>
               <a:rPr lang="en-US" dirty="0"/>
-              <a:t>Your Team Name</a:t>
+              <a:t>Out of Bounds</a:t>
             </a:r>
             <a:endParaRPr lang="en-IN" dirty="0"/>
           </a:p>
@@ -11572,6 +12058,77 @@
                 <a:latin typeface="Arial"/>
               </a:rPr>
               <a:t>spectrum monitoring, cognitive radio, SIGINT and interference hunting</a:t>
+            </a:r>
+          </a:p>
+        </p:txBody>
+      </p:sp>
+      <p:sp>
+        <p:nvSpPr>
+          <p:cNvPr id="17425" name="TextBox 17424"/>
+          <p:cNvSpPr txBox="1"/>
+          <p:nvPr/>
+        </p:nvSpPr>
+        <p:spPr>
+          <a:xfrm>
+            <a:off x="10776992" y="200248"/>
+            <a:ext cx="1280160" cy="914400"/>
+          </a:xfrm>
+          <a:prstGeom prst="rect">
+            <a:avLst/>
+          </a:prstGeom>
+          <a:noFill/>
+        </p:spPr>
+        <p:txBody>
+          <a:bodyPr wrap="none" lIns="0" rIns="0" tIns="0" bIns="0">
+            <a:spAutoFit/>
+          </a:bodyPr>
+          <a:lstStyle/>
+          <a:p>
+            <a:pPr algn="ctr">
+              <a:lnSpc>
+                <a:spcPct val="95000"/>
+              </a:lnSpc>
+            </a:pPr>
+            <a:r>
+              <a:rPr sz="1400" b="1">
+                <a:solidFill>
+                  <a:srgbClr val="415861"/>
+                </a:solidFill>
+                <a:latin typeface="Arial"/>
+              </a:rPr>
+              <a:t>SMART INDIA</a:t>
+            </a:r>
+          </a:p>
+          <a:p>
+            <a:pPr algn="ctr">
+              <a:lnSpc>
+                <a:spcPct val="95000"/>
+              </a:lnSpc>
+            </a:pPr>
+            <a:r>
+              <a:rPr sz="1400" b="1">
+                <a:solidFill>
+                  <a:srgbClr val="415861"/>
+                </a:solidFill>
+                <a:latin typeface="Arial"/>
+              </a:rPr>
+              <a:t>HACKATHON</a:t>
+            </a:r>
+          </a:p>
+          <a:p>
+            <a:pPr algn="ctr">
+              <a:lnSpc>
+                <a:spcPct val="95000"/>
+              </a:lnSpc>
+            </a:pPr>
+            <a:r>
+              <a:rPr sz="1400" b="1">
+                <a:solidFill>
+                  <a:srgbClr val="415861"/>
+                </a:solidFill>
+                <a:latin typeface="Arial"/>
+              </a:rPr>
+              <a:t>2026</a:t>
             </a:r>
           </a:p>
         </p:txBody>
@@ -11876,13 +12433,13 @@
           <a:blip r:embed="rId3">
             <a:alphaModFix/>
           </a:blip>
-          <a:srcRect/>
+          <a:srcRect r="57500"/>
           <a:stretch/>
         </p:blipFill>
         <p:spPr>
           <a:xfrm>
             <a:off x="9803911" y="81376"/>
-            <a:ext cx="2246575" cy="1149075"/>
+            <a:ext cx="954794" cy="1149075"/>
           </a:xfrm>
           <a:prstGeom prst="rect">
             <a:avLst/>
@@ -11938,7 +12495,7 @@
             <a:pPr algn="ctr"/>
             <a:r>
               <a:rPr lang="en-US" dirty="0"/>
-              <a:t>Your Team Name</a:t>
+              <a:t>Out of Bounds</a:t>
             </a:r>
             <a:endParaRPr lang="en-IN" dirty="0"/>
           </a:p>
@@ -12397,30 +12954,3374 @@
           </a:p>
         </p:txBody>
       </p:sp>
-      <p:pic>
-        <p:nvPicPr>
-          <p:cNvPr id="17414" name="Picture 17413" descr="periodic_intercept.png"/>
-          <p:cNvPicPr>
-            <a:picLocks noChangeAspect="1"/>
-          </p:cNvPicPr>
-          <p:nvPr/>
-        </p:nvPicPr>
-        <p:blipFill>
-          <a:blip r:embed="rId4"/>
-          <a:stretch>
-            <a:fillRect/>
-          </a:stretch>
-        </p:blipFill>
-        <p:spPr>
-          <a:xfrm>
-            <a:off x="6629400" y="3429000"/>
-            <a:ext cx="5257800" cy="2366010"/>
+      <p:sp>
+        <p:nvSpPr>
+          <p:cNvPr id="17414" name="TextBox 17413"/>
+          <p:cNvSpPr txBox="1"/>
+          <p:nvPr/>
+        </p:nvSpPr>
+        <p:spPr>
+          <a:xfrm>
+            <a:off x="6675120" y="3474720"/>
+            <a:ext cx="5120640" cy="566928"/>
           </a:xfrm>
           <a:prstGeom prst="rect">
             <a:avLst/>
           </a:prstGeom>
-        </p:spPr>
-      </p:pic>
+          <a:noFill/>
+        </p:spPr>
+        <p:txBody>
+          <a:bodyPr wrap="square" anchor="t" lIns="45720" rIns="45720">
+            <a:spAutoFit/>
+          </a:bodyPr>
+          <a:lstStyle/>
+          <a:p>
+            <a:pPr algn="l"/>
+            <a:r>
+              <a:rPr sz="1200" b="1">
+                <a:solidFill>
+                  <a:srgbClr val="1F3B6E"/>
+                </a:solidFill>
+                <a:latin typeface="Arial"/>
+              </a:rPr>
+              <a:t>Lock-out, visualised: </a:t>
+            </a:r>
+            <a:r>
+              <a:rPr sz="1200" b="0">
+                <a:solidFill>
+                  <a:srgbClr val="222222"/>
+                </a:solidFill>
+                <a:latin typeface="Arial"/>
+              </a:rPr>
+              <a:t>visiting a radar every 16 slots never lands on its beam; every 19 slots catches it at 3.2 s.</a:t>
+            </a:r>
+          </a:p>
+        </p:txBody>
+      </p:sp>
+      <p:sp>
+        <p:nvSpPr>
+          <p:cNvPr id="17417" name="TextBox 17416"/>
+          <p:cNvSpPr txBox="1"/>
+          <p:nvPr/>
+        </p:nvSpPr>
+        <p:spPr>
+          <a:xfrm>
+            <a:off x="10776992" y="200248"/>
+            <a:ext cx="1280160" cy="914400"/>
+          </a:xfrm>
+          <a:prstGeom prst="rect">
+            <a:avLst/>
+          </a:prstGeom>
+          <a:noFill/>
+        </p:spPr>
+        <p:txBody>
+          <a:bodyPr wrap="none" lIns="0" rIns="0" tIns="0" bIns="0">
+            <a:spAutoFit/>
+          </a:bodyPr>
+          <a:lstStyle/>
+          <a:p>
+            <a:pPr algn="ctr">
+              <a:lnSpc>
+                <a:spcPct val="95000"/>
+              </a:lnSpc>
+            </a:pPr>
+            <a:r>
+              <a:rPr sz="1400" b="1">
+                <a:solidFill>
+                  <a:srgbClr val="415861"/>
+                </a:solidFill>
+                <a:latin typeface="Arial"/>
+              </a:rPr>
+              <a:t>SMART INDIA</a:t>
+            </a:r>
+          </a:p>
+          <a:p>
+            <a:pPr algn="ctr">
+              <a:lnSpc>
+                <a:spcPct val="95000"/>
+              </a:lnSpc>
+            </a:pPr>
+            <a:r>
+              <a:rPr sz="1400" b="1">
+                <a:solidFill>
+                  <a:srgbClr val="415861"/>
+                </a:solidFill>
+                <a:latin typeface="Arial"/>
+              </a:rPr>
+              <a:t>HACKATHON</a:t>
+            </a:r>
+          </a:p>
+          <a:p>
+            <a:pPr algn="ctr">
+              <a:lnSpc>
+                <a:spcPct val="95000"/>
+              </a:lnSpc>
+            </a:pPr>
+            <a:r>
+              <a:rPr sz="1400" b="1">
+                <a:solidFill>
+                  <a:srgbClr val="415861"/>
+                </a:solidFill>
+                <a:latin typeface="Arial"/>
+              </a:rPr>
+              <a:t>2026</a:t>
+            </a:r>
+          </a:p>
+        </p:txBody>
+      </p:sp>
+      <p:sp>
+        <p:nvSpPr>
+          <p:cNvPr id="17418" name="TextBox 17417"/>
+          <p:cNvSpPr txBox="1"/>
+          <p:nvPr/>
+        </p:nvSpPr>
+        <p:spPr>
+          <a:xfrm>
+            <a:off x="6720840" y="4224528"/>
+            <a:ext cx="1508760" cy="237744"/>
+          </a:xfrm>
+          <a:prstGeom prst="rect">
+            <a:avLst/>
+          </a:prstGeom>
+          <a:noFill/>
+        </p:spPr>
+        <p:txBody>
+          <a:bodyPr wrap="square" anchor="ctr" lIns="0" rIns="0" tIns="0" bIns="0">
+            <a:spAutoFit/>
+          </a:bodyPr>
+          <a:lstStyle/>
+          <a:p>
+            <a:pPr algn="l"/>
+            <a:r>
+              <a:rPr sz="1000" b="0">
+                <a:solidFill>
+                  <a:srgbClr val="34445C"/>
+                </a:solidFill>
+                <a:latin typeface="Arial"/>
+              </a:rPr>
+              <a:t>Enemy radar beam on us</a:t>
+            </a:r>
+          </a:p>
+        </p:txBody>
+      </p:sp>
+      <p:sp>
+        <p:nvSpPr>
+          <p:cNvPr id="17419" name="Rectangle 17418"/>
+          <p:cNvSpPr/>
+          <p:nvPr/>
+        </p:nvSpPr>
+        <p:spPr>
+          <a:xfrm>
+            <a:off x="8275320" y="4224528"/>
+            <a:ext cx="3474719" cy="237744"/>
+          </a:xfrm>
+          <a:prstGeom prst="rect">
+            <a:avLst/>
+          </a:prstGeom>
+          <a:solidFill>
+            <a:srgbClr val="E9EEF5"/>
+          </a:solidFill>
+          <a:ln>
+            <a:noFill/>
+          </a:ln>
+          <a:effectLst/>
+        </p:spPr>
+        <p:style>
+          <a:lnRef idx="1">
+            <a:schemeClr val="accent1"/>
+          </a:lnRef>
+          <a:fillRef idx="3">
+            <a:schemeClr val="accent1"/>
+          </a:fillRef>
+          <a:effectRef idx="2">
+            <a:schemeClr val="accent1"/>
+          </a:effectRef>
+          <a:fontRef idx="minor">
+            <a:schemeClr val="lt1"/>
+          </a:fontRef>
+        </p:style>
+        <p:txBody>
+          <a:bodyPr rtlCol="0" anchor="ctr"/>
+          <a:lstStyle/>
+          <a:p>
+            <a:pPr algn="ctr"/>
+          </a:p>
+        </p:txBody>
+      </p:sp>
+      <p:sp>
+        <p:nvSpPr>
+          <p:cNvPr id="17420" name="TextBox 17419"/>
+          <p:cNvSpPr txBox="1"/>
+          <p:nvPr/>
+        </p:nvSpPr>
+        <p:spPr>
+          <a:xfrm>
+            <a:off x="6720840" y="4636008"/>
+            <a:ext cx="1508760" cy="237744"/>
+          </a:xfrm>
+          <a:prstGeom prst="rect">
+            <a:avLst/>
+          </a:prstGeom>
+          <a:noFill/>
+        </p:spPr>
+        <p:txBody>
+          <a:bodyPr wrap="square" anchor="ctr" lIns="0" rIns="0" tIns="0" bIns="0">
+            <a:spAutoFit/>
+          </a:bodyPr>
+          <a:lstStyle/>
+          <a:p>
+            <a:pPr algn="l"/>
+            <a:r>
+              <a:rPr sz="1000" b="0">
+                <a:solidFill>
+                  <a:srgbClr val="34445C"/>
+                </a:solidFill>
+                <a:latin typeface="Arial"/>
+              </a:rPr>
+              <a:t>Visit every 16 slots (today)</a:t>
+            </a:r>
+          </a:p>
+        </p:txBody>
+      </p:sp>
+      <p:sp>
+        <p:nvSpPr>
+          <p:cNvPr id="17421" name="Rectangle 17420"/>
+          <p:cNvSpPr/>
+          <p:nvPr/>
+        </p:nvSpPr>
+        <p:spPr>
+          <a:xfrm>
+            <a:off x="8275320" y="4636008"/>
+            <a:ext cx="3474719" cy="237744"/>
+          </a:xfrm>
+          <a:prstGeom prst="rect">
+            <a:avLst/>
+          </a:prstGeom>
+          <a:solidFill>
+            <a:srgbClr val="E9EEF5"/>
+          </a:solidFill>
+          <a:ln>
+            <a:noFill/>
+          </a:ln>
+          <a:effectLst/>
+        </p:spPr>
+        <p:style>
+          <a:lnRef idx="1">
+            <a:schemeClr val="accent1"/>
+          </a:lnRef>
+          <a:fillRef idx="3">
+            <a:schemeClr val="accent1"/>
+          </a:fillRef>
+          <a:effectRef idx="2">
+            <a:schemeClr val="accent1"/>
+          </a:effectRef>
+          <a:fontRef idx="minor">
+            <a:schemeClr val="lt1"/>
+          </a:fontRef>
+        </p:style>
+        <p:txBody>
+          <a:bodyPr rtlCol="0" anchor="ctr"/>
+          <a:lstStyle/>
+          <a:p>
+            <a:pPr algn="ctr"/>
+          </a:p>
+        </p:txBody>
+      </p:sp>
+      <p:sp>
+        <p:nvSpPr>
+          <p:cNvPr id="17422" name="TextBox 17421"/>
+          <p:cNvSpPr txBox="1"/>
+          <p:nvPr/>
+        </p:nvSpPr>
+        <p:spPr>
+          <a:xfrm>
+            <a:off x="6720840" y="5047488"/>
+            <a:ext cx="1508760" cy="237744"/>
+          </a:xfrm>
+          <a:prstGeom prst="rect">
+            <a:avLst/>
+          </a:prstGeom>
+          <a:noFill/>
+        </p:spPr>
+        <p:txBody>
+          <a:bodyPr wrap="square" anchor="ctr" lIns="0" rIns="0" tIns="0" bIns="0">
+            <a:spAutoFit/>
+          </a:bodyPr>
+          <a:lstStyle/>
+          <a:p>
+            <a:pPr algn="l"/>
+            <a:r>
+              <a:rPr sz="1000" b="0">
+                <a:solidFill>
+                  <a:srgbClr val="34445C"/>
+                </a:solidFill>
+                <a:latin typeface="Arial"/>
+              </a:rPr>
+              <a:t>Visit every 19 slots (optimal)</a:t>
+            </a:r>
+          </a:p>
+        </p:txBody>
+      </p:sp>
+      <p:sp>
+        <p:nvSpPr>
+          <p:cNvPr id="17423" name="Rectangle 17422"/>
+          <p:cNvSpPr/>
+          <p:nvPr/>
+        </p:nvSpPr>
+        <p:spPr>
+          <a:xfrm>
+            <a:off x="8275320" y="5047488"/>
+            <a:ext cx="3474719" cy="237744"/>
+          </a:xfrm>
+          <a:prstGeom prst="rect">
+            <a:avLst/>
+          </a:prstGeom>
+          <a:solidFill>
+            <a:srgbClr val="E9EEF5"/>
+          </a:solidFill>
+          <a:ln>
+            <a:noFill/>
+          </a:ln>
+          <a:effectLst/>
+        </p:spPr>
+        <p:style>
+          <a:lnRef idx="1">
+            <a:schemeClr val="accent1"/>
+          </a:lnRef>
+          <a:fillRef idx="3">
+            <a:schemeClr val="accent1"/>
+          </a:fillRef>
+          <a:effectRef idx="2">
+            <a:schemeClr val="accent1"/>
+          </a:effectRef>
+          <a:fontRef idx="minor">
+            <a:schemeClr val="lt1"/>
+          </a:fontRef>
+        </p:style>
+        <p:txBody>
+          <a:bodyPr rtlCol="0" anchor="ctr"/>
+          <a:lstStyle/>
+          <a:p>
+            <a:pPr algn="ctr"/>
+          </a:p>
+        </p:txBody>
+      </p:sp>
+      <p:sp>
+        <p:nvSpPr>
+          <p:cNvPr id="17424" name="Rectangle 17423"/>
+          <p:cNvSpPr/>
+          <p:nvPr/>
+        </p:nvSpPr>
+        <p:spPr>
+          <a:xfrm>
+            <a:off x="8283024" y="4224528"/>
+            <a:ext cx="32004" cy="237744"/>
+          </a:xfrm>
+          <a:prstGeom prst="rect">
+            <a:avLst/>
+          </a:prstGeom>
+          <a:solidFill>
+            <a:srgbClr val="E0523F"/>
+          </a:solidFill>
+          <a:ln>
+            <a:noFill/>
+          </a:ln>
+          <a:effectLst/>
+        </p:spPr>
+        <p:style>
+          <a:lnRef idx="1">
+            <a:schemeClr val="accent1"/>
+          </a:lnRef>
+          <a:fillRef idx="3">
+            <a:schemeClr val="accent1"/>
+          </a:fillRef>
+          <a:effectRef idx="2">
+            <a:schemeClr val="accent1"/>
+          </a:effectRef>
+          <a:fontRef idx="minor">
+            <a:schemeClr val="lt1"/>
+          </a:fontRef>
+        </p:style>
+        <p:txBody>
+          <a:bodyPr rtlCol="0" anchor="ctr"/>
+          <a:lstStyle/>
+          <a:p>
+            <a:pPr algn="ctr"/>
+          </a:p>
+        </p:txBody>
+      </p:sp>
+      <p:sp>
+        <p:nvSpPr>
+          <p:cNvPr id="17425" name="Rectangle 17424"/>
+          <p:cNvSpPr/>
+          <p:nvPr/>
+        </p:nvSpPr>
+        <p:spPr>
+          <a:xfrm>
+            <a:off x="8776111" y="4224528"/>
+            <a:ext cx="32004" cy="237744"/>
+          </a:xfrm>
+          <a:prstGeom prst="rect">
+            <a:avLst/>
+          </a:prstGeom>
+          <a:solidFill>
+            <a:srgbClr val="E0523F"/>
+          </a:solidFill>
+          <a:ln>
+            <a:noFill/>
+          </a:ln>
+          <a:effectLst/>
+        </p:spPr>
+        <p:style>
+          <a:lnRef idx="1">
+            <a:schemeClr val="accent1"/>
+          </a:lnRef>
+          <a:fillRef idx="3">
+            <a:schemeClr val="accent1"/>
+          </a:fillRef>
+          <a:effectRef idx="2">
+            <a:schemeClr val="accent1"/>
+          </a:effectRef>
+          <a:fontRef idx="minor">
+            <a:schemeClr val="lt1"/>
+          </a:fontRef>
+        </p:style>
+        <p:txBody>
+          <a:bodyPr rtlCol="0" anchor="ctr"/>
+          <a:lstStyle/>
+          <a:p>
+            <a:pPr algn="ctr"/>
+          </a:p>
+        </p:txBody>
+      </p:sp>
+      <p:sp>
+        <p:nvSpPr>
+          <p:cNvPr id="17426" name="Rectangle 17425"/>
+          <p:cNvSpPr/>
+          <p:nvPr/>
+        </p:nvSpPr>
+        <p:spPr>
+          <a:xfrm>
+            <a:off x="9269197" y="4224528"/>
+            <a:ext cx="32004" cy="237744"/>
+          </a:xfrm>
+          <a:prstGeom prst="rect">
+            <a:avLst/>
+          </a:prstGeom>
+          <a:solidFill>
+            <a:srgbClr val="E0523F"/>
+          </a:solidFill>
+          <a:ln>
+            <a:noFill/>
+          </a:ln>
+          <a:effectLst/>
+        </p:spPr>
+        <p:style>
+          <a:lnRef idx="1">
+            <a:schemeClr val="accent1"/>
+          </a:lnRef>
+          <a:fillRef idx="3">
+            <a:schemeClr val="accent1"/>
+          </a:fillRef>
+          <a:effectRef idx="2">
+            <a:schemeClr val="accent1"/>
+          </a:effectRef>
+          <a:fontRef idx="minor">
+            <a:schemeClr val="lt1"/>
+          </a:fontRef>
+        </p:style>
+        <p:txBody>
+          <a:bodyPr rtlCol="0" anchor="ctr"/>
+          <a:lstStyle/>
+          <a:p>
+            <a:pPr algn="ctr"/>
+          </a:p>
+        </p:txBody>
+      </p:sp>
+      <p:sp>
+        <p:nvSpPr>
+          <p:cNvPr id="17427" name="Rectangle 17426"/>
+          <p:cNvSpPr/>
+          <p:nvPr/>
+        </p:nvSpPr>
+        <p:spPr>
+          <a:xfrm>
+            <a:off x="9762284" y="4224528"/>
+            <a:ext cx="32004" cy="237744"/>
+          </a:xfrm>
+          <a:prstGeom prst="rect">
+            <a:avLst/>
+          </a:prstGeom>
+          <a:solidFill>
+            <a:srgbClr val="E0523F"/>
+          </a:solidFill>
+          <a:ln>
+            <a:noFill/>
+          </a:ln>
+          <a:effectLst/>
+        </p:spPr>
+        <p:style>
+          <a:lnRef idx="1">
+            <a:schemeClr val="accent1"/>
+          </a:lnRef>
+          <a:fillRef idx="3">
+            <a:schemeClr val="accent1"/>
+          </a:fillRef>
+          <a:effectRef idx="2">
+            <a:schemeClr val="accent1"/>
+          </a:effectRef>
+          <a:fontRef idx="minor">
+            <a:schemeClr val="lt1"/>
+          </a:fontRef>
+        </p:style>
+        <p:txBody>
+          <a:bodyPr rtlCol="0" anchor="ctr"/>
+          <a:lstStyle/>
+          <a:p>
+            <a:pPr algn="ctr"/>
+          </a:p>
+        </p:txBody>
+      </p:sp>
+      <p:sp>
+        <p:nvSpPr>
+          <p:cNvPr id="17428" name="Rectangle 17427"/>
+          <p:cNvSpPr/>
+          <p:nvPr/>
+        </p:nvSpPr>
+        <p:spPr>
+          <a:xfrm>
+            <a:off x="10255371" y="4224528"/>
+            <a:ext cx="32004" cy="237744"/>
+          </a:xfrm>
+          <a:prstGeom prst="rect">
+            <a:avLst/>
+          </a:prstGeom>
+          <a:solidFill>
+            <a:srgbClr val="E0523F"/>
+          </a:solidFill>
+          <a:ln>
+            <a:noFill/>
+          </a:ln>
+          <a:effectLst/>
+        </p:spPr>
+        <p:style>
+          <a:lnRef idx="1">
+            <a:schemeClr val="accent1"/>
+          </a:lnRef>
+          <a:fillRef idx="3">
+            <a:schemeClr val="accent1"/>
+          </a:fillRef>
+          <a:effectRef idx="2">
+            <a:schemeClr val="accent1"/>
+          </a:effectRef>
+          <a:fontRef idx="minor">
+            <a:schemeClr val="lt1"/>
+          </a:fontRef>
+        </p:style>
+        <p:txBody>
+          <a:bodyPr rtlCol="0" anchor="ctr"/>
+          <a:lstStyle/>
+          <a:p>
+            <a:pPr algn="ctr"/>
+          </a:p>
+        </p:txBody>
+      </p:sp>
+      <p:sp>
+        <p:nvSpPr>
+          <p:cNvPr id="17429" name="Rectangle 17428"/>
+          <p:cNvSpPr/>
+          <p:nvPr/>
+        </p:nvSpPr>
+        <p:spPr>
+          <a:xfrm>
+            <a:off x="10748457" y="4224528"/>
+            <a:ext cx="32004" cy="237744"/>
+          </a:xfrm>
+          <a:prstGeom prst="rect">
+            <a:avLst/>
+          </a:prstGeom>
+          <a:solidFill>
+            <a:srgbClr val="E0523F"/>
+          </a:solidFill>
+          <a:ln>
+            <a:noFill/>
+          </a:ln>
+          <a:effectLst/>
+        </p:spPr>
+        <p:style>
+          <a:lnRef idx="1">
+            <a:schemeClr val="accent1"/>
+          </a:lnRef>
+          <a:fillRef idx="3">
+            <a:schemeClr val="accent1"/>
+          </a:fillRef>
+          <a:effectRef idx="2">
+            <a:schemeClr val="accent1"/>
+          </a:effectRef>
+          <a:fontRef idx="minor">
+            <a:schemeClr val="lt1"/>
+          </a:fontRef>
+        </p:style>
+        <p:txBody>
+          <a:bodyPr rtlCol="0" anchor="ctr"/>
+          <a:lstStyle/>
+          <a:p>
+            <a:pPr algn="ctr"/>
+          </a:p>
+        </p:txBody>
+      </p:sp>
+      <p:sp>
+        <p:nvSpPr>
+          <p:cNvPr id="17430" name="Rectangle 17429"/>
+          <p:cNvSpPr/>
+          <p:nvPr/>
+        </p:nvSpPr>
+        <p:spPr>
+          <a:xfrm>
+            <a:off x="11241544" y="4224528"/>
+            <a:ext cx="32004" cy="237744"/>
+          </a:xfrm>
+          <a:prstGeom prst="rect">
+            <a:avLst/>
+          </a:prstGeom>
+          <a:solidFill>
+            <a:srgbClr val="E0523F"/>
+          </a:solidFill>
+          <a:ln>
+            <a:noFill/>
+          </a:ln>
+          <a:effectLst/>
+        </p:spPr>
+        <p:style>
+          <a:lnRef idx="1">
+            <a:schemeClr val="accent1"/>
+          </a:lnRef>
+          <a:fillRef idx="3">
+            <a:schemeClr val="accent1"/>
+          </a:fillRef>
+          <a:effectRef idx="2">
+            <a:schemeClr val="accent1"/>
+          </a:effectRef>
+          <a:fontRef idx="minor">
+            <a:schemeClr val="lt1"/>
+          </a:fontRef>
+        </p:style>
+        <p:txBody>
+          <a:bodyPr rtlCol="0" anchor="ctr"/>
+          <a:lstStyle/>
+          <a:p>
+            <a:pPr algn="ctr"/>
+          </a:p>
+        </p:txBody>
+      </p:sp>
+      <p:sp>
+        <p:nvSpPr>
+          <p:cNvPr id="17431" name="Rectangle 17430"/>
+          <p:cNvSpPr/>
+          <p:nvPr/>
+        </p:nvSpPr>
+        <p:spPr>
+          <a:xfrm>
+            <a:off x="11734631" y="4224528"/>
+            <a:ext cx="32004" cy="237744"/>
+          </a:xfrm>
+          <a:prstGeom prst="rect">
+            <a:avLst/>
+          </a:prstGeom>
+          <a:solidFill>
+            <a:srgbClr val="E0523F"/>
+          </a:solidFill>
+          <a:ln>
+            <a:noFill/>
+          </a:ln>
+          <a:effectLst/>
+        </p:spPr>
+        <p:style>
+          <a:lnRef idx="1">
+            <a:schemeClr val="accent1"/>
+          </a:lnRef>
+          <a:fillRef idx="3">
+            <a:schemeClr val="accent1"/>
+          </a:fillRef>
+          <a:effectRef idx="2">
+            <a:schemeClr val="accent1"/>
+          </a:effectRef>
+          <a:fontRef idx="minor">
+            <a:schemeClr val="lt1"/>
+          </a:fontRef>
+        </p:style>
+        <p:txBody>
+          <a:bodyPr rtlCol="0" anchor="ctr"/>
+          <a:lstStyle/>
+          <a:p>
+            <a:pPr algn="ctr"/>
+          </a:p>
+        </p:txBody>
+      </p:sp>
+      <p:sp>
+        <p:nvSpPr>
+          <p:cNvPr id="17432" name="Rectangle 17431"/>
+          <p:cNvSpPr/>
+          <p:nvPr/>
+        </p:nvSpPr>
+        <p:spPr>
+          <a:xfrm>
+            <a:off x="8268919" y="4681728"/>
+            <a:ext cx="12801" cy="146304"/>
+          </a:xfrm>
+          <a:prstGeom prst="rect">
+            <a:avLst/>
+          </a:prstGeom>
+          <a:solidFill>
+            <a:srgbClr val="5D6C82"/>
+          </a:solidFill>
+          <a:ln>
+            <a:noFill/>
+          </a:ln>
+          <a:effectLst/>
+        </p:spPr>
+        <p:style>
+          <a:lnRef idx="1">
+            <a:schemeClr val="accent1"/>
+          </a:lnRef>
+          <a:fillRef idx="3">
+            <a:schemeClr val="accent1"/>
+          </a:fillRef>
+          <a:effectRef idx="2">
+            <a:schemeClr val="accent1"/>
+          </a:effectRef>
+          <a:fontRef idx="minor">
+            <a:schemeClr val="lt1"/>
+          </a:fontRef>
+        </p:style>
+        <p:txBody>
+          <a:bodyPr rtlCol="0" anchor="ctr"/>
+          <a:lstStyle/>
+          <a:p>
+            <a:pPr algn="ctr"/>
+          </a:p>
+        </p:txBody>
+      </p:sp>
+      <p:sp>
+        <p:nvSpPr>
+          <p:cNvPr id="17433" name="Rectangle 17432"/>
+          <p:cNvSpPr/>
+          <p:nvPr/>
+        </p:nvSpPr>
+        <p:spPr>
+          <a:xfrm>
+            <a:off x="8392190" y="4681728"/>
+            <a:ext cx="12801" cy="146304"/>
+          </a:xfrm>
+          <a:prstGeom prst="rect">
+            <a:avLst/>
+          </a:prstGeom>
+          <a:solidFill>
+            <a:srgbClr val="5D6C82"/>
+          </a:solidFill>
+          <a:ln>
+            <a:noFill/>
+          </a:ln>
+          <a:effectLst/>
+        </p:spPr>
+        <p:style>
+          <a:lnRef idx="1">
+            <a:schemeClr val="accent1"/>
+          </a:lnRef>
+          <a:fillRef idx="3">
+            <a:schemeClr val="accent1"/>
+          </a:fillRef>
+          <a:effectRef idx="2">
+            <a:schemeClr val="accent1"/>
+          </a:effectRef>
+          <a:fontRef idx="minor">
+            <a:schemeClr val="lt1"/>
+          </a:fontRef>
+        </p:style>
+        <p:txBody>
+          <a:bodyPr rtlCol="0" anchor="ctr"/>
+          <a:lstStyle/>
+          <a:p>
+            <a:pPr algn="ctr"/>
+          </a:p>
+        </p:txBody>
+      </p:sp>
+      <p:sp>
+        <p:nvSpPr>
+          <p:cNvPr id="17434" name="Rectangle 17433"/>
+          <p:cNvSpPr/>
+          <p:nvPr/>
+        </p:nvSpPr>
+        <p:spPr>
+          <a:xfrm>
+            <a:off x="8515462" y="4681728"/>
+            <a:ext cx="12801" cy="146304"/>
+          </a:xfrm>
+          <a:prstGeom prst="rect">
+            <a:avLst/>
+          </a:prstGeom>
+          <a:solidFill>
+            <a:srgbClr val="5D6C82"/>
+          </a:solidFill>
+          <a:ln>
+            <a:noFill/>
+          </a:ln>
+          <a:effectLst/>
+        </p:spPr>
+        <p:style>
+          <a:lnRef idx="1">
+            <a:schemeClr val="accent1"/>
+          </a:lnRef>
+          <a:fillRef idx="3">
+            <a:schemeClr val="accent1"/>
+          </a:fillRef>
+          <a:effectRef idx="2">
+            <a:schemeClr val="accent1"/>
+          </a:effectRef>
+          <a:fontRef idx="minor">
+            <a:schemeClr val="lt1"/>
+          </a:fontRef>
+        </p:style>
+        <p:txBody>
+          <a:bodyPr rtlCol="0" anchor="ctr"/>
+          <a:lstStyle/>
+          <a:p>
+            <a:pPr algn="ctr"/>
+          </a:p>
+        </p:txBody>
+      </p:sp>
+      <p:sp>
+        <p:nvSpPr>
+          <p:cNvPr id="17435" name="Rectangle 17434"/>
+          <p:cNvSpPr/>
+          <p:nvPr/>
+        </p:nvSpPr>
+        <p:spPr>
+          <a:xfrm>
+            <a:off x="8638734" y="4681728"/>
+            <a:ext cx="12801" cy="146304"/>
+          </a:xfrm>
+          <a:prstGeom prst="rect">
+            <a:avLst/>
+          </a:prstGeom>
+          <a:solidFill>
+            <a:srgbClr val="5D6C82"/>
+          </a:solidFill>
+          <a:ln>
+            <a:noFill/>
+          </a:ln>
+          <a:effectLst/>
+        </p:spPr>
+        <p:style>
+          <a:lnRef idx="1">
+            <a:schemeClr val="accent1"/>
+          </a:lnRef>
+          <a:fillRef idx="3">
+            <a:schemeClr val="accent1"/>
+          </a:fillRef>
+          <a:effectRef idx="2">
+            <a:schemeClr val="accent1"/>
+          </a:effectRef>
+          <a:fontRef idx="minor">
+            <a:schemeClr val="lt1"/>
+          </a:fontRef>
+        </p:style>
+        <p:txBody>
+          <a:bodyPr rtlCol="0" anchor="ctr"/>
+          <a:lstStyle/>
+          <a:p>
+            <a:pPr algn="ctr"/>
+          </a:p>
+        </p:txBody>
+      </p:sp>
+      <p:sp>
+        <p:nvSpPr>
+          <p:cNvPr id="17436" name="Rectangle 17435"/>
+          <p:cNvSpPr/>
+          <p:nvPr/>
+        </p:nvSpPr>
+        <p:spPr>
+          <a:xfrm>
+            <a:off x="8762005" y="4681728"/>
+            <a:ext cx="12801" cy="146304"/>
+          </a:xfrm>
+          <a:prstGeom prst="rect">
+            <a:avLst/>
+          </a:prstGeom>
+          <a:solidFill>
+            <a:srgbClr val="5D6C82"/>
+          </a:solidFill>
+          <a:ln>
+            <a:noFill/>
+          </a:ln>
+          <a:effectLst/>
+        </p:spPr>
+        <p:style>
+          <a:lnRef idx="1">
+            <a:schemeClr val="accent1"/>
+          </a:lnRef>
+          <a:fillRef idx="3">
+            <a:schemeClr val="accent1"/>
+          </a:fillRef>
+          <a:effectRef idx="2">
+            <a:schemeClr val="accent1"/>
+          </a:effectRef>
+          <a:fontRef idx="minor">
+            <a:schemeClr val="lt1"/>
+          </a:fontRef>
+        </p:style>
+        <p:txBody>
+          <a:bodyPr rtlCol="0" anchor="ctr"/>
+          <a:lstStyle/>
+          <a:p>
+            <a:pPr algn="ctr"/>
+          </a:p>
+        </p:txBody>
+      </p:sp>
+      <p:sp>
+        <p:nvSpPr>
+          <p:cNvPr id="17437" name="Rectangle 17436"/>
+          <p:cNvSpPr/>
+          <p:nvPr/>
+        </p:nvSpPr>
+        <p:spPr>
+          <a:xfrm>
+            <a:off x="8885277" y="4681728"/>
+            <a:ext cx="12801" cy="146304"/>
+          </a:xfrm>
+          <a:prstGeom prst="rect">
+            <a:avLst/>
+          </a:prstGeom>
+          <a:solidFill>
+            <a:srgbClr val="5D6C82"/>
+          </a:solidFill>
+          <a:ln>
+            <a:noFill/>
+          </a:ln>
+          <a:effectLst/>
+        </p:spPr>
+        <p:style>
+          <a:lnRef idx="1">
+            <a:schemeClr val="accent1"/>
+          </a:lnRef>
+          <a:fillRef idx="3">
+            <a:schemeClr val="accent1"/>
+          </a:fillRef>
+          <a:effectRef idx="2">
+            <a:schemeClr val="accent1"/>
+          </a:effectRef>
+          <a:fontRef idx="minor">
+            <a:schemeClr val="lt1"/>
+          </a:fontRef>
+        </p:style>
+        <p:txBody>
+          <a:bodyPr rtlCol="0" anchor="ctr"/>
+          <a:lstStyle/>
+          <a:p>
+            <a:pPr algn="ctr"/>
+          </a:p>
+        </p:txBody>
+      </p:sp>
+      <p:sp>
+        <p:nvSpPr>
+          <p:cNvPr id="17438" name="Rectangle 17437"/>
+          <p:cNvSpPr/>
+          <p:nvPr/>
+        </p:nvSpPr>
+        <p:spPr>
+          <a:xfrm>
+            <a:off x="9008549" y="4681728"/>
+            <a:ext cx="12801" cy="146304"/>
+          </a:xfrm>
+          <a:prstGeom prst="rect">
+            <a:avLst/>
+          </a:prstGeom>
+          <a:solidFill>
+            <a:srgbClr val="5D6C82"/>
+          </a:solidFill>
+          <a:ln>
+            <a:noFill/>
+          </a:ln>
+          <a:effectLst/>
+        </p:spPr>
+        <p:style>
+          <a:lnRef idx="1">
+            <a:schemeClr val="accent1"/>
+          </a:lnRef>
+          <a:fillRef idx="3">
+            <a:schemeClr val="accent1"/>
+          </a:fillRef>
+          <a:effectRef idx="2">
+            <a:schemeClr val="accent1"/>
+          </a:effectRef>
+          <a:fontRef idx="minor">
+            <a:schemeClr val="lt1"/>
+          </a:fontRef>
+        </p:style>
+        <p:txBody>
+          <a:bodyPr rtlCol="0" anchor="ctr"/>
+          <a:lstStyle/>
+          <a:p>
+            <a:pPr algn="ctr"/>
+          </a:p>
+        </p:txBody>
+      </p:sp>
+      <p:sp>
+        <p:nvSpPr>
+          <p:cNvPr id="17439" name="Rectangle 17438"/>
+          <p:cNvSpPr/>
+          <p:nvPr/>
+        </p:nvSpPr>
+        <p:spPr>
+          <a:xfrm>
+            <a:off x="9131820" y="4681728"/>
+            <a:ext cx="12801" cy="146304"/>
+          </a:xfrm>
+          <a:prstGeom prst="rect">
+            <a:avLst/>
+          </a:prstGeom>
+          <a:solidFill>
+            <a:srgbClr val="5D6C82"/>
+          </a:solidFill>
+          <a:ln>
+            <a:noFill/>
+          </a:ln>
+          <a:effectLst/>
+        </p:spPr>
+        <p:style>
+          <a:lnRef idx="1">
+            <a:schemeClr val="accent1"/>
+          </a:lnRef>
+          <a:fillRef idx="3">
+            <a:schemeClr val="accent1"/>
+          </a:fillRef>
+          <a:effectRef idx="2">
+            <a:schemeClr val="accent1"/>
+          </a:effectRef>
+          <a:fontRef idx="minor">
+            <a:schemeClr val="lt1"/>
+          </a:fontRef>
+        </p:style>
+        <p:txBody>
+          <a:bodyPr rtlCol="0" anchor="ctr"/>
+          <a:lstStyle/>
+          <a:p>
+            <a:pPr algn="ctr"/>
+          </a:p>
+        </p:txBody>
+      </p:sp>
+      <p:sp>
+        <p:nvSpPr>
+          <p:cNvPr id="17440" name="Rectangle 17439"/>
+          <p:cNvSpPr/>
+          <p:nvPr/>
+        </p:nvSpPr>
+        <p:spPr>
+          <a:xfrm>
+            <a:off x="9255092" y="4681728"/>
+            <a:ext cx="12801" cy="146304"/>
+          </a:xfrm>
+          <a:prstGeom prst="rect">
+            <a:avLst/>
+          </a:prstGeom>
+          <a:solidFill>
+            <a:srgbClr val="5D6C82"/>
+          </a:solidFill>
+          <a:ln>
+            <a:noFill/>
+          </a:ln>
+          <a:effectLst/>
+        </p:spPr>
+        <p:style>
+          <a:lnRef idx="1">
+            <a:schemeClr val="accent1"/>
+          </a:lnRef>
+          <a:fillRef idx="3">
+            <a:schemeClr val="accent1"/>
+          </a:fillRef>
+          <a:effectRef idx="2">
+            <a:schemeClr val="accent1"/>
+          </a:effectRef>
+          <a:fontRef idx="minor">
+            <a:schemeClr val="lt1"/>
+          </a:fontRef>
+        </p:style>
+        <p:txBody>
+          <a:bodyPr rtlCol="0" anchor="ctr"/>
+          <a:lstStyle/>
+          <a:p>
+            <a:pPr algn="ctr"/>
+          </a:p>
+        </p:txBody>
+      </p:sp>
+      <p:sp>
+        <p:nvSpPr>
+          <p:cNvPr id="17441" name="Rectangle 17440"/>
+          <p:cNvSpPr/>
+          <p:nvPr/>
+        </p:nvSpPr>
+        <p:spPr>
+          <a:xfrm>
+            <a:off x="9378364" y="4681728"/>
+            <a:ext cx="12801" cy="146304"/>
+          </a:xfrm>
+          <a:prstGeom prst="rect">
+            <a:avLst/>
+          </a:prstGeom>
+          <a:solidFill>
+            <a:srgbClr val="5D6C82"/>
+          </a:solidFill>
+          <a:ln>
+            <a:noFill/>
+          </a:ln>
+          <a:effectLst/>
+        </p:spPr>
+        <p:style>
+          <a:lnRef idx="1">
+            <a:schemeClr val="accent1"/>
+          </a:lnRef>
+          <a:fillRef idx="3">
+            <a:schemeClr val="accent1"/>
+          </a:fillRef>
+          <a:effectRef idx="2">
+            <a:schemeClr val="accent1"/>
+          </a:effectRef>
+          <a:fontRef idx="minor">
+            <a:schemeClr val="lt1"/>
+          </a:fontRef>
+        </p:style>
+        <p:txBody>
+          <a:bodyPr rtlCol="0" anchor="ctr"/>
+          <a:lstStyle/>
+          <a:p>
+            <a:pPr algn="ctr"/>
+          </a:p>
+        </p:txBody>
+      </p:sp>
+      <p:sp>
+        <p:nvSpPr>
+          <p:cNvPr id="17442" name="Rectangle 17441"/>
+          <p:cNvSpPr/>
+          <p:nvPr/>
+        </p:nvSpPr>
+        <p:spPr>
+          <a:xfrm>
+            <a:off x="9501635" y="4681728"/>
+            <a:ext cx="12801" cy="146304"/>
+          </a:xfrm>
+          <a:prstGeom prst="rect">
+            <a:avLst/>
+          </a:prstGeom>
+          <a:solidFill>
+            <a:srgbClr val="5D6C82"/>
+          </a:solidFill>
+          <a:ln>
+            <a:noFill/>
+          </a:ln>
+          <a:effectLst/>
+        </p:spPr>
+        <p:style>
+          <a:lnRef idx="1">
+            <a:schemeClr val="accent1"/>
+          </a:lnRef>
+          <a:fillRef idx="3">
+            <a:schemeClr val="accent1"/>
+          </a:fillRef>
+          <a:effectRef idx="2">
+            <a:schemeClr val="accent1"/>
+          </a:effectRef>
+          <a:fontRef idx="minor">
+            <a:schemeClr val="lt1"/>
+          </a:fontRef>
+        </p:style>
+        <p:txBody>
+          <a:bodyPr rtlCol="0" anchor="ctr"/>
+          <a:lstStyle/>
+          <a:p>
+            <a:pPr algn="ctr"/>
+          </a:p>
+        </p:txBody>
+      </p:sp>
+      <p:sp>
+        <p:nvSpPr>
+          <p:cNvPr id="17443" name="Rectangle 17442"/>
+          <p:cNvSpPr/>
+          <p:nvPr/>
+        </p:nvSpPr>
+        <p:spPr>
+          <a:xfrm>
+            <a:off x="9624907" y="4681728"/>
+            <a:ext cx="12801" cy="146304"/>
+          </a:xfrm>
+          <a:prstGeom prst="rect">
+            <a:avLst/>
+          </a:prstGeom>
+          <a:solidFill>
+            <a:srgbClr val="5D6C82"/>
+          </a:solidFill>
+          <a:ln>
+            <a:noFill/>
+          </a:ln>
+          <a:effectLst/>
+        </p:spPr>
+        <p:style>
+          <a:lnRef idx="1">
+            <a:schemeClr val="accent1"/>
+          </a:lnRef>
+          <a:fillRef idx="3">
+            <a:schemeClr val="accent1"/>
+          </a:fillRef>
+          <a:effectRef idx="2">
+            <a:schemeClr val="accent1"/>
+          </a:effectRef>
+          <a:fontRef idx="minor">
+            <a:schemeClr val="lt1"/>
+          </a:fontRef>
+        </p:style>
+        <p:txBody>
+          <a:bodyPr rtlCol="0" anchor="ctr"/>
+          <a:lstStyle/>
+          <a:p>
+            <a:pPr algn="ctr"/>
+          </a:p>
+        </p:txBody>
+      </p:sp>
+      <p:sp>
+        <p:nvSpPr>
+          <p:cNvPr id="17444" name="Rectangle 17443"/>
+          <p:cNvSpPr/>
+          <p:nvPr/>
+        </p:nvSpPr>
+        <p:spPr>
+          <a:xfrm>
+            <a:off x="9748179" y="4681728"/>
+            <a:ext cx="12801" cy="146304"/>
+          </a:xfrm>
+          <a:prstGeom prst="rect">
+            <a:avLst/>
+          </a:prstGeom>
+          <a:solidFill>
+            <a:srgbClr val="5D6C82"/>
+          </a:solidFill>
+          <a:ln>
+            <a:noFill/>
+          </a:ln>
+          <a:effectLst/>
+        </p:spPr>
+        <p:style>
+          <a:lnRef idx="1">
+            <a:schemeClr val="accent1"/>
+          </a:lnRef>
+          <a:fillRef idx="3">
+            <a:schemeClr val="accent1"/>
+          </a:fillRef>
+          <a:effectRef idx="2">
+            <a:schemeClr val="accent1"/>
+          </a:effectRef>
+          <a:fontRef idx="minor">
+            <a:schemeClr val="lt1"/>
+          </a:fontRef>
+        </p:style>
+        <p:txBody>
+          <a:bodyPr rtlCol="0" anchor="ctr"/>
+          <a:lstStyle/>
+          <a:p>
+            <a:pPr algn="ctr"/>
+          </a:p>
+        </p:txBody>
+      </p:sp>
+      <p:sp>
+        <p:nvSpPr>
+          <p:cNvPr id="17445" name="Rectangle 17444"/>
+          <p:cNvSpPr/>
+          <p:nvPr/>
+        </p:nvSpPr>
+        <p:spPr>
+          <a:xfrm>
+            <a:off x="9871450" y="4681728"/>
+            <a:ext cx="12801" cy="146304"/>
+          </a:xfrm>
+          <a:prstGeom prst="rect">
+            <a:avLst/>
+          </a:prstGeom>
+          <a:solidFill>
+            <a:srgbClr val="5D6C82"/>
+          </a:solidFill>
+          <a:ln>
+            <a:noFill/>
+          </a:ln>
+          <a:effectLst/>
+        </p:spPr>
+        <p:style>
+          <a:lnRef idx="1">
+            <a:schemeClr val="accent1"/>
+          </a:lnRef>
+          <a:fillRef idx="3">
+            <a:schemeClr val="accent1"/>
+          </a:fillRef>
+          <a:effectRef idx="2">
+            <a:schemeClr val="accent1"/>
+          </a:effectRef>
+          <a:fontRef idx="minor">
+            <a:schemeClr val="lt1"/>
+          </a:fontRef>
+        </p:style>
+        <p:txBody>
+          <a:bodyPr rtlCol="0" anchor="ctr"/>
+          <a:lstStyle/>
+          <a:p>
+            <a:pPr algn="ctr"/>
+          </a:p>
+        </p:txBody>
+      </p:sp>
+      <p:sp>
+        <p:nvSpPr>
+          <p:cNvPr id="17446" name="Rectangle 17445"/>
+          <p:cNvSpPr/>
+          <p:nvPr/>
+        </p:nvSpPr>
+        <p:spPr>
+          <a:xfrm>
+            <a:off x="9994722" y="4681728"/>
+            <a:ext cx="12801" cy="146304"/>
+          </a:xfrm>
+          <a:prstGeom prst="rect">
+            <a:avLst/>
+          </a:prstGeom>
+          <a:solidFill>
+            <a:srgbClr val="5D6C82"/>
+          </a:solidFill>
+          <a:ln>
+            <a:noFill/>
+          </a:ln>
+          <a:effectLst/>
+        </p:spPr>
+        <p:style>
+          <a:lnRef idx="1">
+            <a:schemeClr val="accent1"/>
+          </a:lnRef>
+          <a:fillRef idx="3">
+            <a:schemeClr val="accent1"/>
+          </a:fillRef>
+          <a:effectRef idx="2">
+            <a:schemeClr val="accent1"/>
+          </a:effectRef>
+          <a:fontRef idx="minor">
+            <a:schemeClr val="lt1"/>
+          </a:fontRef>
+        </p:style>
+        <p:txBody>
+          <a:bodyPr rtlCol="0" anchor="ctr"/>
+          <a:lstStyle/>
+          <a:p>
+            <a:pPr algn="ctr"/>
+          </a:p>
+        </p:txBody>
+      </p:sp>
+      <p:sp>
+        <p:nvSpPr>
+          <p:cNvPr id="17447" name="Rectangle 17446"/>
+          <p:cNvSpPr/>
+          <p:nvPr/>
+        </p:nvSpPr>
+        <p:spPr>
+          <a:xfrm>
+            <a:off x="10117994" y="4681728"/>
+            <a:ext cx="12801" cy="146304"/>
+          </a:xfrm>
+          <a:prstGeom prst="rect">
+            <a:avLst/>
+          </a:prstGeom>
+          <a:solidFill>
+            <a:srgbClr val="5D6C82"/>
+          </a:solidFill>
+          <a:ln>
+            <a:noFill/>
+          </a:ln>
+          <a:effectLst/>
+        </p:spPr>
+        <p:style>
+          <a:lnRef idx="1">
+            <a:schemeClr val="accent1"/>
+          </a:lnRef>
+          <a:fillRef idx="3">
+            <a:schemeClr val="accent1"/>
+          </a:fillRef>
+          <a:effectRef idx="2">
+            <a:schemeClr val="accent1"/>
+          </a:effectRef>
+          <a:fontRef idx="minor">
+            <a:schemeClr val="lt1"/>
+          </a:fontRef>
+        </p:style>
+        <p:txBody>
+          <a:bodyPr rtlCol="0" anchor="ctr"/>
+          <a:lstStyle/>
+          <a:p>
+            <a:pPr algn="ctr"/>
+          </a:p>
+        </p:txBody>
+      </p:sp>
+      <p:sp>
+        <p:nvSpPr>
+          <p:cNvPr id="17448" name="Rectangle 17447"/>
+          <p:cNvSpPr/>
+          <p:nvPr/>
+        </p:nvSpPr>
+        <p:spPr>
+          <a:xfrm>
+            <a:off x="10241265" y="4681728"/>
+            <a:ext cx="12801" cy="146304"/>
+          </a:xfrm>
+          <a:prstGeom prst="rect">
+            <a:avLst/>
+          </a:prstGeom>
+          <a:solidFill>
+            <a:srgbClr val="5D6C82"/>
+          </a:solidFill>
+          <a:ln>
+            <a:noFill/>
+          </a:ln>
+          <a:effectLst/>
+        </p:spPr>
+        <p:style>
+          <a:lnRef idx="1">
+            <a:schemeClr val="accent1"/>
+          </a:lnRef>
+          <a:fillRef idx="3">
+            <a:schemeClr val="accent1"/>
+          </a:fillRef>
+          <a:effectRef idx="2">
+            <a:schemeClr val="accent1"/>
+          </a:effectRef>
+          <a:fontRef idx="minor">
+            <a:schemeClr val="lt1"/>
+          </a:fontRef>
+        </p:style>
+        <p:txBody>
+          <a:bodyPr rtlCol="0" anchor="ctr"/>
+          <a:lstStyle/>
+          <a:p>
+            <a:pPr algn="ctr"/>
+          </a:p>
+        </p:txBody>
+      </p:sp>
+      <p:sp>
+        <p:nvSpPr>
+          <p:cNvPr id="17449" name="Rectangle 17448"/>
+          <p:cNvSpPr/>
+          <p:nvPr/>
+        </p:nvSpPr>
+        <p:spPr>
+          <a:xfrm>
+            <a:off x="10364537" y="4681728"/>
+            <a:ext cx="12801" cy="146304"/>
+          </a:xfrm>
+          <a:prstGeom prst="rect">
+            <a:avLst/>
+          </a:prstGeom>
+          <a:solidFill>
+            <a:srgbClr val="5D6C82"/>
+          </a:solidFill>
+          <a:ln>
+            <a:noFill/>
+          </a:ln>
+          <a:effectLst/>
+        </p:spPr>
+        <p:style>
+          <a:lnRef idx="1">
+            <a:schemeClr val="accent1"/>
+          </a:lnRef>
+          <a:fillRef idx="3">
+            <a:schemeClr val="accent1"/>
+          </a:fillRef>
+          <a:effectRef idx="2">
+            <a:schemeClr val="accent1"/>
+          </a:effectRef>
+          <a:fontRef idx="minor">
+            <a:schemeClr val="lt1"/>
+          </a:fontRef>
+        </p:style>
+        <p:txBody>
+          <a:bodyPr rtlCol="0" anchor="ctr"/>
+          <a:lstStyle/>
+          <a:p>
+            <a:pPr algn="ctr"/>
+          </a:p>
+        </p:txBody>
+      </p:sp>
+      <p:sp>
+        <p:nvSpPr>
+          <p:cNvPr id="17450" name="Rectangle 17449"/>
+          <p:cNvSpPr/>
+          <p:nvPr/>
+        </p:nvSpPr>
+        <p:spPr>
+          <a:xfrm>
+            <a:off x="10487809" y="4681728"/>
+            <a:ext cx="12801" cy="146304"/>
+          </a:xfrm>
+          <a:prstGeom prst="rect">
+            <a:avLst/>
+          </a:prstGeom>
+          <a:solidFill>
+            <a:srgbClr val="5D6C82"/>
+          </a:solidFill>
+          <a:ln>
+            <a:noFill/>
+          </a:ln>
+          <a:effectLst/>
+        </p:spPr>
+        <p:style>
+          <a:lnRef idx="1">
+            <a:schemeClr val="accent1"/>
+          </a:lnRef>
+          <a:fillRef idx="3">
+            <a:schemeClr val="accent1"/>
+          </a:fillRef>
+          <a:effectRef idx="2">
+            <a:schemeClr val="accent1"/>
+          </a:effectRef>
+          <a:fontRef idx="minor">
+            <a:schemeClr val="lt1"/>
+          </a:fontRef>
+        </p:style>
+        <p:txBody>
+          <a:bodyPr rtlCol="0" anchor="ctr"/>
+          <a:lstStyle/>
+          <a:p>
+            <a:pPr algn="ctr"/>
+          </a:p>
+        </p:txBody>
+      </p:sp>
+      <p:sp>
+        <p:nvSpPr>
+          <p:cNvPr id="17451" name="Rectangle 17450"/>
+          <p:cNvSpPr/>
+          <p:nvPr/>
+        </p:nvSpPr>
+        <p:spPr>
+          <a:xfrm>
+            <a:off x="10611080" y="4681728"/>
+            <a:ext cx="12801" cy="146304"/>
+          </a:xfrm>
+          <a:prstGeom prst="rect">
+            <a:avLst/>
+          </a:prstGeom>
+          <a:solidFill>
+            <a:srgbClr val="5D6C82"/>
+          </a:solidFill>
+          <a:ln>
+            <a:noFill/>
+          </a:ln>
+          <a:effectLst/>
+        </p:spPr>
+        <p:style>
+          <a:lnRef idx="1">
+            <a:schemeClr val="accent1"/>
+          </a:lnRef>
+          <a:fillRef idx="3">
+            <a:schemeClr val="accent1"/>
+          </a:fillRef>
+          <a:effectRef idx="2">
+            <a:schemeClr val="accent1"/>
+          </a:effectRef>
+          <a:fontRef idx="minor">
+            <a:schemeClr val="lt1"/>
+          </a:fontRef>
+        </p:style>
+        <p:txBody>
+          <a:bodyPr rtlCol="0" anchor="ctr"/>
+          <a:lstStyle/>
+          <a:p>
+            <a:pPr algn="ctr"/>
+          </a:p>
+        </p:txBody>
+      </p:sp>
+      <p:sp>
+        <p:nvSpPr>
+          <p:cNvPr id="17452" name="Rectangle 17451"/>
+          <p:cNvSpPr/>
+          <p:nvPr/>
+        </p:nvSpPr>
+        <p:spPr>
+          <a:xfrm>
+            <a:off x="10734352" y="4681728"/>
+            <a:ext cx="12801" cy="146304"/>
+          </a:xfrm>
+          <a:prstGeom prst="rect">
+            <a:avLst/>
+          </a:prstGeom>
+          <a:solidFill>
+            <a:srgbClr val="5D6C82"/>
+          </a:solidFill>
+          <a:ln>
+            <a:noFill/>
+          </a:ln>
+          <a:effectLst/>
+        </p:spPr>
+        <p:style>
+          <a:lnRef idx="1">
+            <a:schemeClr val="accent1"/>
+          </a:lnRef>
+          <a:fillRef idx="3">
+            <a:schemeClr val="accent1"/>
+          </a:fillRef>
+          <a:effectRef idx="2">
+            <a:schemeClr val="accent1"/>
+          </a:effectRef>
+          <a:fontRef idx="minor">
+            <a:schemeClr val="lt1"/>
+          </a:fontRef>
+        </p:style>
+        <p:txBody>
+          <a:bodyPr rtlCol="0" anchor="ctr"/>
+          <a:lstStyle/>
+          <a:p>
+            <a:pPr algn="ctr"/>
+          </a:p>
+        </p:txBody>
+      </p:sp>
+      <p:sp>
+        <p:nvSpPr>
+          <p:cNvPr id="17453" name="Rectangle 17452"/>
+          <p:cNvSpPr/>
+          <p:nvPr/>
+        </p:nvSpPr>
+        <p:spPr>
+          <a:xfrm>
+            <a:off x="10857624" y="4681728"/>
+            <a:ext cx="12801" cy="146304"/>
+          </a:xfrm>
+          <a:prstGeom prst="rect">
+            <a:avLst/>
+          </a:prstGeom>
+          <a:solidFill>
+            <a:srgbClr val="5D6C82"/>
+          </a:solidFill>
+          <a:ln>
+            <a:noFill/>
+          </a:ln>
+          <a:effectLst/>
+        </p:spPr>
+        <p:style>
+          <a:lnRef idx="1">
+            <a:schemeClr val="accent1"/>
+          </a:lnRef>
+          <a:fillRef idx="3">
+            <a:schemeClr val="accent1"/>
+          </a:fillRef>
+          <a:effectRef idx="2">
+            <a:schemeClr val="accent1"/>
+          </a:effectRef>
+          <a:fontRef idx="minor">
+            <a:schemeClr val="lt1"/>
+          </a:fontRef>
+        </p:style>
+        <p:txBody>
+          <a:bodyPr rtlCol="0" anchor="ctr"/>
+          <a:lstStyle/>
+          <a:p>
+            <a:pPr algn="ctr"/>
+          </a:p>
+        </p:txBody>
+      </p:sp>
+      <p:sp>
+        <p:nvSpPr>
+          <p:cNvPr id="17454" name="Rectangle 17453"/>
+          <p:cNvSpPr/>
+          <p:nvPr/>
+        </p:nvSpPr>
+        <p:spPr>
+          <a:xfrm>
+            <a:off x="10980895" y="4681728"/>
+            <a:ext cx="12801" cy="146304"/>
+          </a:xfrm>
+          <a:prstGeom prst="rect">
+            <a:avLst/>
+          </a:prstGeom>
+          <a:solidFill>
+            <a:srgbClr val="5D6C82"/>
+          </a:solidFill>
+          <a:ln>
+            <a:noFill/>
+          </a:ln>
+          <a:effectLst/>
+        </p:spPr>
+        <p:style>
+          <a:lnRef idx="1">
+            <a:schemeClr val="accent1"/>
+          </a:lnRef>
+          <a:fillRef idx="3">
+            <a:schemeClr val="accent1"/>
+          </a:fillRef>
+          <a:effectRef idx="2">
+            <a:schemeClr val="accent1"/>
+          </a:effectRef>
+          <a:fontRef idx="minor">
+            <a:schemeClr val="lt1"/>
+          </a:fontRef>
+        </p:style>
+        <p:txBody>
+          <a:bodyPr rtlCol="0" anchor="ctr"/>
+          <a:lstStyle/>
+          <a:p>
+            <a:pPr algn="ctr"/>
+          </a:p>
+        </p:txBody>
+      </p:sp>
+      <p:sp>
+        <p:nvSpPr>
+          <p:cNvPr id="17455" name="Rectangle 17454"/>
+          <p:cNvSpPr/>
+          <p:nvPr/>
+        </p:nvSpPr>
+        <p:spPr>
+          <a:xfrm>
+            <a:off x="11104167" y="4681728"/>
+            <a:ext cx="12801" cy="146304"/>
+          </a:xfrm>
+          <a:prstGeom prst="rect">
+            <a:avLst/>
+          </a:prstGeom>
+          <a:solidFill>
+            <a:srgbClr val="5D6C82"/>
+          </a:solidFill>
+          <a:ln>
+            <a:noFill/>
+          </a:ln>
+          <a:effectLst/>
+        </p:spPr>
+        <p:style>
+          <a:lnRef idx="1">
+            <a:schemeClr val="accent1"/>
+          </a:lnRef>
+          <a:fillRef idx="3">
+            <a:schemeClr val="accent1"/>
+          </a:fillRef>
+          <a:effectRef idx="2">
+            <a:schemeClr val="accent1"/>
+          </a:effectRef>
+          <a:fontRef idx="minor">
+            <a:schemeClr val="lt1"/>
+          </a:fontRef>
+        </p:style>
+        <p:txBody>
+          <a:bodyPr rtlCol="0" anchor="ctr"/>
+          <a:lstStyle/>
+          <a:p>
+            <a:pPr algn="ctr"/>
+          </a:p>
+        </p:txBody>
+      </p:sp>
+      <p:sp>
+        <p:nvSpPr>
+          <p:cNvPr id="17456" name="Rectangle 17455"/>
+          <p:cNvSpPr/>
+          <p:nvPr/>
+        </p:nvSpPr>
+        <p:spPr>
+          <a:xfrm>
+            <a:off x="11227439" y="4681728"/>
+            <a:ext cx="12801" cy="146304"/>
+          </a:xfrm>
+          <a:prstGeom prst="rect">
+            <a:avLst/>
+          </a:prstGeom>
+          <a:solidFill>
+            <a:srgbClr val="5D6C82"/>
+          </a:solidFill>
+          <a:ln>
+            <a:noFill/>
+          </a:ln>
+          <a:effectLst/>
+        </p:spPr>
+        <p:style>
+          <a:lnRef idx="1">
+            <a:schemeClr val="accent1"/>
+          </a:lnRef>
+          <a:fillRef idx="3">
+            <a:schemeClr val="accent1"/>
+          </a:fillRef>
+          <a:effectRef idx="2">
+            <a:schemeClr val="accent1"/>
+          </a:effectRef>
+          <a:fontRef idx="minor">
+            <a:schemeClr val="lt1"/>
+          </a:fontRef>
+        </p:style>
+        <p:txBody>
+          <a:bodyPr rtlCol="0" anchor="ctr"/>
+          <a:lstStyle/>
+          <a:p>
+            <a:pPr algn="ctr"/>
+          </a:p>
+        </p:txBody>
+      </p:sp>
+      <p:sp>
+        <p:nvSpPr>
+          <p:cNvPr id="17457" name="Rectangle 17456"/>
+          <p:cNvSpPr/>
+          <p:nvPr/>
+        </p:nvSpPr>
+        <p:spPr>
+          <a:xfrm>
+            <a:off x="11350710" y="4681728"/>
+            <a:ext cx="12801" cy="146304"/>
+          </a:xfrm>
+          <a:prstGeom prst="rect">
+            <a:avLst/>
+          </a:prstGeom>
+          <a:solidFill>
+            <a:srgbClr val="5D6C82"/>
+          </a:solidFill>
+          <a:ln>
+            <a:noFill/>
+          </a:ln>
+          <a:effectLst/>
+        </p:spPr>
+        <p:style>
+          <a:lnRef idx="1">
+            <a:schemeClr val="accent1"/>
+          </a:lnRef>
+          <a:fillRef idx="3">
+            <a:schemeClr val="accent1"/>
+          </a:fillRef>
+          <a:effectRef idx="2">
+            <a:schemeClr val="accent1"/>
+          </a:effectRef>
+          <a:fontRef idx="minor">
+            <a:schemeClr val="lt1"/>
+          </a:fontRef>
+        </p:style>
+        <p:txBody>
+          <a:bodyPr rtlCol="0" anchor="ctr"/>
+          <a:lstStyle/>
+          <a:p>
+            <a:pPr algn="ctr"/>
+          </a:p>
+        </p:txBody>
+      </p:sp>
+      <p:sp>
+        <p:nvSpPr>
+          <p:cNvPr id="17458" name="Rectangle 17457"/>
+          <p:cNvSpPr/>
+          <p:nvPr/>
+        </p:nvSpPr>
+        <p:spPr>
+          <a:xfrm>
+            <a:off x="11473982" y="4681728"/>
+            <a:ext cx="12801" cy="146304"/>
+          </a:xfrm>
+          <a:prstGeom prst="rect">
+            <a:avLst/>
+          </a:prstGeom>
+          <a:solidFill>
+            <a:srgbClr val="5D6C82"/>
+          </a:solidFill>
+          <a:ln>
+            <a:noFill/>
+          </a:ln>
+          <a:effectLst/>
+        </p:spPr>
+        <p:style>
+          <a:lnRef idx="1">
+            <a:schemeClr val="accent1"/>
+          </a:lnRef>
+          <a:fillRef idx="3">
+            <a:schemeClr val="accent1"/>
+          </a:fillRef>
+          <a:effectRef idx="2">
+            <a:schemeClr val="accent1"/>
+          </a:effectRef>
+          <a:fontRef idx="minor">
+            <a:schemeClr val="lt1"/>
+          </a:fontRef>
+        </p:style>
+        <p:txBody>
+          <a:bodyPr rtlCol="0" anchor="ctr"/>
+          <a:lstStyle/>
+          <a:p>
+            <a:pPr algn="ctr"/>
+          </a:p>
+        </p:txBody>
+      </p:sp>
+      <p:sp>
+        <p:nvSpPr>
+          <p:cNvPr id="17459" name="Rectangle 17458"/>
+          <p:cNvSpPr/>
+          <p:nvPr/>
+        </p:nvSpPr>
+        <p:spPr>
+          <a:xfrm>
+            <a:off x="11597254" y="4681728"/>
+            <a:ext cx="12801" cy="146304"/>
+          </a:xfrm>
+          <a:prstGeom prst="rect">
+            <a:avLst/>
+          </a:prstGeom>
+          <a:solidFill>
+            <a:srgbClr val="5D6C82"/>
+          </a:solidFill>
+          <a:ln>
+            <a:noFill/>
+          </a:ln>
+          <a:effectLst/>
+        </p:spPr>
+        <p:style>
+          <a:lnRef idx="1">
+            <a:schemeClr val="accent1"/>
+          </a:lnRef>
+          <a:fillRef idx="3">
+            <a:schemeClr val="accent1"/>
+          </a:fillRef>
+          <a:effectRef idx="2">
+            <a:schemeClr val="accent1"/>
+          </a:effectRef>
+          <a:fontRef idx="minor">
+            <a:schemeClr val="lt1"/>
+          </a:fontRef>
+        </p:style>
+        <p:txBody>
+          <a:bodyPr rtlCol="0" anchor="ctr"/>
+          <a:lstStyle/>
+          <a:p>
+            <a:pPr algn="ctr"/>
+          </a:p>
+        </p:txBody>
+      </p:sp>
+      <p:sp>
+        <p:nvSpPr>
+          <p:cNvPr id="17460" name="Rectangle 17459"/>
+          <p:cNvSpPr/>
+          <p:nvPr/>
+        </p:nvSpPr>
+        <p:spPr>
+          <a:xfrm>
+            <a:off x="11720525" y="4681728"/>
+            <a:ext cx="12801" cy="146304"/>
+          </a:xfrm>
+          <a:prstGeom prst="rect">
+            <a:avLst/>
+          </a:prstGeom>
+          <a:solidFill>
+            <a:srgbClr val="5D6C82"/>
+          </a:solidFill>
+          <a:ln>
+            <a:noFill/>
+          </a:ln>
+          <a:effectLst/>
+        </p:spPr>
+        <p:style>
+          <a:lnRef idx="1">
+            <a:schemeClr val="accent1"/>
+          </a:lnRef>
+          <a:fillRef idx="3">
+            <a:schemeClr val="accent1"/>
+          </a:fillRef>
+          <a:effectRef idx="2">
+            <a:schemeClr val="accent1"/>
+          </a:effectRef>
+          <a:fontRef idx="minor">
+            <a:schemeClr val="lt1"/>
+          </a:fontRef>
+        </p:style>
+        <p:txBody>
+          <a:bodyPr rtlCol="0" anchor="ctr"/>
+          <a:lstStyle/>
+          <a:p>
+            <a:pPr algn="ctr"/>
+          </a:p>
+        </p:txBody>
+      </p:sp>
+      <p:sp>
+        <p:nvSpPr>
+          <p:cNvPr id="17461" name="Rectangle 17460"/>
+          <p:cNvSpPr/>
+          <p:nvPr/>
+        </p:nvSpPr>
+        <p:spPr>
+          <a:xfrm>
+            <a:off x="8268919" y="5093207"/>
+            <a:ext cx="12801" cy="146304"/>
+          </a:xfrm>
+          <a:prstGeom prst="rect">
+            <a:avLst/>
+          </a:prstGeom>
+          <a:solidFill>
+            <a:srgbClr val="5D6C82"/>
+          </a:solidFill>
+          <a:ln>
+            <a:noFill/>
+          </a:ln>
+          <a:effectLst/>
+        </p:spPr>
+        <p:style>
+          <a:lnRef idx="1">
+            <a:schemeClr val="accent1"/>
+          </a:lnRef>
+          <a:fillRef idx="3">
+            <a:schemeClr val="accent1"/>
+          </a:fillRef>
+          <a:effectRef idx="2">
+            <a:schemeClr val="accent1"/>
+          </a:effectRef>
+          <a:fontRef idx="minor">
+            <a:schemeClr val="lt1"/>
+          </a:fontRef>
+        </p:style>
+        <p:txBody>
+          <a:bodyPr rtlCol="0" anchor="ctr"/>
+          <a:lstStyle/>
+          <a:p>
+            <a:pPr algn="ctr"/>
+          </a:p>
+        </p:txBody>
+      </p:sp>
+      <p:sp>
+        <p:nvSpPr>
+          <p:cNvPr id="17462" name="Rectangle 17461"/>
+          <p:cNvSpPr/>
+          <p:nvPr/>
+        </p:nvSpPr>
+        <p:spPr>
+          <a:xfrm>
+            <a:off x="8415304" y="5093207"/>
+            <a:ext cx="12801" cy="146304"/>
+          </a:xfrm>
+          <a:prstGeom prst="rect">
+            <a:avLst/>
+          </a:prstGeom>
+          <a:solidFill>
+            <a:srgbClr val="5D6C82"/>
+          </a:solidFill>
+          <a:ln>
+            <a:noFill/>
+          </a:ln>
+          <a:effectLst/>
+        </p:spPr>
+        <p:style>
+          <a:lnRef idx="1">
+            <a:schemeClr val="accent1"/>
+          </a:lnRef>
+          <a:fillRef idx="3">
+            <a:schemeClr val="accent1"/>
+          </a:fillRef>
+          <a:effectRef idx="2">
+            <a:schemeClr val="accent1"/>
+          </a:effectRef>
+          <a:fontRef idx="minor">
+            <a:schemeClr val="lt1"/>
+          </a:fontRef>
+        </p:style>
+        <p:txBody>
+          <a:bodyPr rtlCol="0" anchor="ctr"/>
+          <a:lstStyle/>
+          <a:p>
+            <a:pPr algn="ctr"/>
+          </a:p>
+        </p:txBody>
+      </p:sp>
+      <p:sp>
+        <p:nvSpPr>
+          <p:cNvPr id="17463" name="Rectangle 17462"/>
+          <p:cNvSpPr/>
+          <p:nvPr/>
+        </p:nvSpPr>
+        <p:spPr>
+          <a:xfrm>
+            <a:off x="8561689" y="5093207"/>
+            <a:ext cx="12801" cy="146304"/>
+          </a:xfrm>
+          <a:prstGeom prst="rect">
+            <a:avLst/>
+          </a:prstGeom>
+          <a:solidFill>
+            <a:srgbClr val="5D6C82"/>
+          </a:solidFill>
+          <a:ln>
+            <a:noFill/>
+          </a:ln>
+          <a:effectLst/>
+        </p:spPr>
+        <p:style>
+          <a:lnRef idx="1">
+            <a:schemeClr val="accent1"/>
+          </a:lnRef>
+          <a:fillRef idx="3">
+            <a:schemeClr val="accent1"/>
+          </a:fillRef>
+          <a:effectRef idx="2">
+            <a:schemeClr val="accent1"/>
+          </a:effectRef>
+          <a:fontRef idx="minor">
+            <a:schemeClr val="lt1"/>
+          </a:fontRef>
+        </p:style>
+        <p:txBody>
+          <a:bodyPr rtlCol="0" anchor="ctr"/>
+          <a:lstStyle/>
+          <a:p>
+            <a:pPr algn="ctr"/>
+          </a:p>
+        </p:txBody>
+      </p:sp>
+      <p:sp>
+        <p:nvSpPr>
+          <p:cNvPr id="17464" name="Rectangle 17463"/>
+          <p:cNvSpPr/>
+          <p:nvPr/>
+        </p:nvSpPr>
+        <p:spPr>
+          <a:xfrm>
+            <a:off x="8708074" y="5093207"/>
+            <a:ext cx="12801" cy="146304"/>
+          </a:xfrm>
+          <a:prstGeom prst="rect">
+            <a:avLst/>
+          </a:prstGeom>
+          <a:solidFill>
+            <a:srgbClr val="5D6C82"/>
+          </a:solidFill>
+          <a:ln>
+            <a:noFill/>
+          </a:ln>
+          <a:effectLst/>
+        </p:spPr>
+        <p:style>
+          <a:lnRef idx="1">
+            <a:schemeClr val="accent1"/>
+          </a:lnRef>
+          <a:fillRef idx="3">
+            <a:schemeClr val="accent1"/>
+          </a:fillRef>
+          <a:effectRef idx="2">
+            <a:schemeClr val="accent1"/>
+          </a:effectRef>
+          <a:fontRef idx="minor">
+            <a:schemeClr val="lt1"/>
+          </a:fontRef>
+        </p:style>
+        <p:txBody>
+          <a:bodyPr rtlCol="0" anchor="ctr"/>
+          <a:lstStyle/>
+          <a:p>
+            <a:pPr algn="ctr"/>
+          </a:p>
+        </p:txBody>
+      </p:sp>
+      <p:sp>
+        <p:nvSpPr>
+          <p:cNvPr id="17465" name="Rectangle 17464"/>
+          <p:cNvSpPr/>
+          <p:nvPr/>
+        </p:nvSpPr>
+        <p:spPr>
+          <a:xfrm>
+            <a:off x="8854459" y="5093207"/>
+            <a:ext cx="12801" cy="146304"/>
+          </a:xfrm>
+          <a:prstGeom prst="rect">
+            <a:avLst/>
+          </a:prstGeom>
+          <a:solidFill>
+            <a:srgbClr val="5D6C82"/>
+          </a:solidFill>
+          <a:ln>
+            <a:noFill/>
+          </a:ln>
+          <a:effectLst/>
+        </p:spPr>
+        <p:style>
+          <a:lnRef idx="1">
+            <a:schemeClr val="accent1"/>
+          </a:lnRef>
+          <a:fillRef idx="3">
+            <a:schemeClr val="accent1"/>
+          </a:fillRef>
+          <a:effectRef idx="2">
+            <a:schemeClr val="accent1"/>
+          </a:effectRef>
+          <a:fontRef idx="minor">
+            <a:schemeClr val="lt1"/>
+          </a:fontRef>
+        </p:style>
+        <p:txBody>
+          <a:bodyPr rtlCol="0" anchor="ctr"/>
+          <a:lstStyle/>
+          <a:p>
+            <a:pPr algn="ctr"/>
+          </a:p>
+        </p:txBody>
+      </p:sp>
+      <p:sp>
+        <p:nvSpPr>
+          <p:cNvPr id="17466" name="Rectangle 17465"/>
+          <p:cNvSpPr/>
+          <p:nvPr/>
+        </p:nvSpPr>
+        <p:spPr>
+          <a:xfrm>
+            <a:off x="9000844" y="5093207"/>
+            <a:ext cx="12801" cy="146304"/>
+          </a:xfrm>
+          <a:prstGeom prst="rect">
+            <a:avLst/>
+          </a:prstGeom>
+          <a:solidFill>
+            <a:srgbClr val="5D6C82"/>
+          </a:solidFill>
+          <a:ln>
+            <a:noFill/>
+          </a:ln>
+          <a:effectLst/>
+        </p:spPr>
+        <p:style>
+          <a:lnRef idx="1">
+            <a:schemeClr val="accent1"/>
+          </a:lnRef>
+          <a:fillRef idx="3">
+            <a:schemeClr val="accent1"/>
+          </a:fillRef>
+          <a:effectRef idx="2">
+            <a:schemeClr val="accent1"/>
+          </a:effectRef>
+          <a:fontRef idx="minor">
+            <a:schemeClr val="lt1"/>
+          </a:fontRef>
+        </p:style>
+        <p:txBody>
+          <a:bodyPr rtlCol="0" anchor="ctr"/>
+          <a:lstStyle/>
+          <a:p>
+            <a:pPr algn="ctr"/>
+          </a:p>
+        </p:txBody>
+      </p:sp>
+      <p:sp>
+        <p:nvSpPr>
+          <p:cNvPr id="17467" name="Rectangle 17466"/>
+          <p:cNvSpPr/>
+          <p:nvPr/>
+        </p:nvSpPr>
+        <p:spPr>
+          <a:xfrm>
+            <a:off x="9147229" y="5093207"/>
+            <a:ext cx="12801" cy="146304"/>
+          </a:xfrm>
+          <a:prstGeom prst="rect">
+            <a:avLst/>
+          </a:prstGeom>
+          <a:solidFill>
+            <a:srgbClr val="5D6C82"/>
+          </a:solidFill>
+          <a:ln>
+            <a:noFill/>
+          </a:ln>
+          <a:effectLst/>
+        </p:spPr>
+        <p:style>
+          <a:lnRef idx="1">
+            <a:schemeClr val="accent1"/>
+          </a:lnRef>
+          <a:fillRef idx="3">
+            <a:schemeClr val="accent1"/>
+          </a:fillRef>
+          <a:effectRef idx="2">
+            <a:schemeClr val="accent1"/>
+          </a:effectRef>
+          <a:fontRef idx="minor">
+            <a:schemeClr val="lt1"/>
+          </a:fontRef>
+        </p:style>
+        <p:txBody>
+          <a:bodyPr rtlCol="0" anchor="ctr"/>
+          <a:lstStyle/>
+          <a:p>
+            <a:pPr algn="ctr"/>
+          </a:p>
+        </p:txBody>
+      </p:sp>
+      <p:sp>
+        <p:nvSpPr>
+          <p:cNvPr id="17468" name="Rectangle 17467"/>
+          <p:cNvSpPr/>
+          <p:nvPr/>
+        </p:nvSpPr>
+        <p:spPr>
+          <a:xfrm>
+            <a:off x="9293614" y="5093207"/>
+            <a:ext cx="12801" cy="146304"/>
+          </a:xfrm>
+          <a:prstGeom prst="rect">
+            <a:avLst/>
+          </a:prstGeom>
+          <a:solidFill>
+            <a:srgbClr val="5D6C82"/>
+          </a:solidFill>
+          <a:ln>
+            <a:noFill/>
+          </a:ln>
+          <a:effectLst/>
+        </p:spPr>
+        <p:style>
+          <a:lnRef idx="1">
+            <a:schemeClr val="accent1"/>
+          </a:lnRef>
+          <a:fillRef idx="3">
+            <a:schemeClr val="accent1"/>
+          </a:fillRef>
+          <a:effectRef idx="2">
+            <a:schemeClr val="accent1"/>
+          </a:effectRef>
+          <a:fontRef idx="minor">
+            <a:schemeClr val="lt1"/>
+          </a:fontRef>
+        </p:style>
+        <p:txBody>
+          <a:bodyPr rtlCol="0" anchor="ctr"/>
+          <a:lstStyle/>
+          <a:p>
+            <a:pPr algn="ctr"/>
+          </a:p>
+        </p:txBody>
+      </p:sp>
+      <p:sp>
+        <p:nvSpPr>
+          <p:cNvPr id="17469" name="Rectangle 17468"/>
+          <p:cNvSpPr/>
+          <p:nvPr/>
+        </p:nvSpPr>
+        <p:spPr>
+          <a:xfrm>
+            <a:off x="9439999" y="5093207"/>
+            <a:ext cx="12801" cy="146304"/>
+          </a:xfrm>
+          <a:prstGeom prst="rect">
+            <a:avLst/>
+          </a:prstGeom>
+          <a:solidFill>
+            <a:srgbClr val="5D6C82"/>
+          </a:solidFill>
+          <a:ln>
+            <a:noFill/>
+          </a:ln>
+          <a:effectLst/>
+        </p:spPr>
+        <p:style>
+          <a:lnRef idx="1">
+            <a:schemeClr val="accent1"/>
+          </a:lnRef>
+          <a:fillRef idx="3">
+            <a:schemeClr val="accent1"/>
+          </a:fillRef>
+          <a:effectRef idx="2">
+            <a:schemeClr val="accent1"/>
+          </a:effectRef>
+          <a:fontRef idx="minor">
+            <a:schemeClr val="lt1"/>
+          </a:fontRef>
+        </p:style>
+        <p:txBody>
+          <a:bodyPr rtlCol="0" anchor="ctr"/>
+          <a:lstStyle/>
+          <a:p>
+            <a:pPr algn="ctr"/>
+          </a:p>
+        </p:txBody>
+      </p:sp>
+      <p:sp>
+        <p:nvSpPr>
+          <p:cNvPr id="17470" name="Rectangle 17469"/>
+          <p:cNvSpPr/>
+          <p:nvPr/>
+        </p:nvSpPr>
+        <p:spPr>
+          <a:xfrm>
+            <a:off x="9586385" y="5093207"/>
+            <a:ext cx="12801" cy="146304"/>
+          </a:xfrm>
+          <a:prstGeom prst="rect">
+            <a:avLst/>
+          </a:prstGeom>
+          <a:solidFill>
+            <a:srgbClr val="5D6C82"/>
+          </a:solidFill>
+          <a:ln>
+            <a:noFill/>
+          </a:ln>
+          <a:effectLst/>
+        </p:spPr>
+        <p:style>
+          <a:lnRef idx="1">
+            <a:schemeClr val="accent1"/>
+          </a:lnRef>
+          <a:fillRef idx="3">
+            <a:schemeClr val="accent1"/>
+          </a:fillRef>
+          <a:effectRef idx="2">
+            <a:schemeClr val="accent1"/>
+          </a:effectRef>
+          <a:fontRef idx="minor">
+            <a:schemeClr val="lt1"/>
+          </a:fontRef>
+        </p:style>
+        <p:txBody>
+          <a:bodyPr rtlCol="0" anchor="ctr"/>
+          <a:lstStyle/>
+          <a:p>
+            <a:pPr algn="ctr"/>
+          </a:p>
+        </p:txBody>
+      </p:sp>
+      <p:sp>
+        <p:nvSpPr>
+          <p:cNvPr id="17471" name="Rectangle 17470"/>
+          <p:cNvSpPr/>
+          <p:nvPr/>
+        </p:nvSpPr>
+        <p:spPr>
+          <a:xfrm>
+            <a:off x="9732770" y="5093207"/>
+            <a:ext cx="12801" cy="146304"/>
+          </a:xfrm>
+          <a:prstGeom prst="rect">
+            <a:avLst/>
+          </a:prstGeom>
+          <a:solidFill>
+            <a:srgbClr val="5D6C82"/>
+          </a:solidFill>
+          <a:ln>
+            <a:noFill/>
+          </a:ln>
+          <a:effectLst/>
+        </p:spPr>
+        <p:style>
+          <a:lnRef idx="1">
+            <a:schemeClr val="accent1"/>
+          </a:lnRef>
+          <a:fillRef idx="3">
+            <a:schemeClr val="accent1"/>
+          </a:fillRef>
+          <a:effectRef idx="2">
+            <a:schemeClr val="accent1"/>
+          </a:effectRef>
+          <a:fontRef idx="minor">
+            <a:schemeClr val="lt1"/>
+          </a:fontRef>
+        </p:style>
+        <p:txBody>
+          <a:bodyPr rtlCol="0" anchor="ctr"/>
+          <a:lstStyle/>
+          <a:p>
+            <a:pPr algn="ctr"/>
+          </a:p>
+        </p:txBody>
+      </p:sp>
+      <p:sp>
+        <p:nvSpPr>
+          <p:cNvPr id="17472" name="Rectangle 17471"/>
+          <p:cNvSpPr/>
+          <p:nvPr/>
+        </p:nvSpPr>
+        <p:spPr>
+          <a:xfrm>
+            <a:off x="9879155" y="5093207"/>
+            <a:ext cx="12801" cy="146304"/>
+          </a:xfrm>
+          <a:prstGeom prst="rect">
+            <a:avLst/>
+          </a:prstGeom>
+          <a:solidFill>
+            <a:srgbClr val="5D6C82"/>
+          </a:solidFill>
+          <a:ln>
+            <a:noFill/>
+          </a:ln>
+          <a:effectLst/>
+        </p:spPr>
+        <p:style>
+          <a:lnRef idx="1">
+            <a:schemeClr val="accent1"/>
+          </a:lnRef>
+          <a:fillRef idx="3">
+            <a:schemeClr val="accent1"/>
+          </a:fillRef>
+          <a:effectRef idx="2">
+            <a:schemeClr val="accent1"/>
+          </a:effectRef>
+          <a:fontRef idx="minor">
+            <a:schemeClr val="lt1"/>
+          </a:fontRef>
+        </p:style>
+        <p:txBody>
+          <a:bodyPr rtlCol="0" anchor="ctr"/>
+          <a:lstStyle/>
+          <a:p>
+            <a:pPr algn="ctr"/>
+          </a:p>
+        </p:txBody>
+      </p:sp>
+      <p:sp>
+        <p:nvSpPr>
+          <p:cNvPr id="17473" name="Rectangle 17472"/>
+          <p:cNvSpPr/>
+          <p:nvPr/>
+        </p:nvSpPr>
+        <p:spPr>
+          <a:xfrm>
+            <a:off x="10025540" y="5093207"/>
+            <a:ext cx="12801" cy="146304"/>
+          </a:xfrm>
+          <a:prstGeom prst="rect">
+            <a:avLst/>
+          </a:prstGeom>
+          <a:solidFill>
+            <a:srgbClr val="5D6C82"/>
+          </a:solidFill>
+          <a:ln>
+            <a:noFill/>
+          </a:ln>
+          <a:effectLst/>
+        </p:spPr>
+        <p:style>
+          <a:lnRef idx="1">
+            <a:schemeClr val="accent1"/>
+          </a:lnRef>
+          <a:fillRef idx="3">
+            <a:schemeClr val="accent1"/>
+          </a:fillRef>
+          <a:effectRef idx="2">
+            <a:schemeClr val="accent1"/>
+          </a:effectRef>
+          <a:fontRef idx="minor">
+            <a:schemeClr val="lt1"/>
+          </a:fontRef>
+        </p:style>
+        <p:txBody>
+          <a:bodyPr rtlCol="0" anchor="ctr"/>
+          <a:lstStyle/>
+          <a:p>
+            <a:pPr algn="ctr"/>
+          </a:p>
+        </p:txBody>
+      </p:sp>
+      <p:sp>
+        <p:nvSpPr>
+          <p:cNvPr id="17474" name="Rectangle 17473"/>
+          <p:cNvSpPr/>
+          <p:nvPr/>
+        </p:nvSpPr>
+        <p:spPr>
+          <a:xfrm>
+            <a:off x="10171925" y="5093207"/>
+            <a:ext cx="12801" cy="146304"/>
+          </a:xfrm>
+          <a:prstGeom prst="rect">
+            <a:avLst/>
+          </a:prstGeom>
+          <a:solidFill>
+            <a:srgbClr val="5D6C82"/>
+          </a:solidFill>
+          <a:ln>
+            <a:noFill/>
+          </a:ln>
+          <a:effectLst/>
+        </p:spPr>
+        <p:style>
+          <a:lnRef idx="1">
+            <a:schemeClr val="accent1"/>
+          </a:lnRef>
+          <a:fillRef idx="3">
+            <a:schemeClr val="accent1"/>
+          </a:fillRef>
+          <a:effectRef idx="2">
+            <a:schemeClr val="accent1"/>
+          </a:effectRef>
+          <a:fontRef idx="minor">
+            <a:schemeClr val="lt1"/>
+          </a:fontRef>
+        </p:style>
+        <p:txBody>
+          <a:bodyPr rtlCol="0" anchor="ctr"/>
+          <a:lstStyle/>
+          <a:p>
+            <a:pPr algn="ctr"/>
+          </a:p>
+        </p:txBody>
+      </p:sp>
+      <p:sp>
+        <p:nvSpPr>
+          <p:cNvPr id="17475" name="Rectangle 17474"/>
+          <p:cNvSpPr/>
+          <p:nvPr/>
+        </p:nvSpPr>
+        <p:spPr>
+          <a:xfrm>
+            <a:off x="10318310" y="5093207"/>
+            <a:ext cx="12801" cy="146304"/>
+          </a:xfrm>
+          <a:prstGeom prst="rect">
+            <a:avLst/>
+          </a:prstGeom>
+          <a:solidFill>
+            <a:srgbClr val="5D6C82"/>
+          </a:solidFill>
+          <a:ln>
+            <a:noFill/>
+          </a:ln>
+          <a:effectLst/>
+        </p:spPr>
+        <p:style>
+          <a:lnRef idx="1">
+            <a:schemeClr val="accent1"/>
+          </a:lnRef>
+          <a:fillRef idx="3">
+            <a:schemeClr val="accent1"/>
+          </a:fillRef>
+          <a:effectRef idx="2">
+            <a:schemeClr val="accent1"/>
+          </a:effectRef>
+          <a:fontRef idx="minor">
+            <a:schemeClr val="lt1"/>
+          </a:fontRef>
+        </p:style>
+        <p:txBody>
+          <a:bodyPr rtlCol="0" anchor="ctr"/>
+          <a:lstStyle/>
+          <a:p>
+            <a:pPr algn="ctr"/>
+          </a:p>
+        </p:txBody>
+      </p:sp>
+      <p:sp>
+        <p:nvSpPr>
+          <p:cNvPr id="17476" name="Rectangle 17475"/>
+          <p:cNvSpPr/>
+          <p:nvPr/>
+        </p:nvSpPr>
+        <p:spPr>
+          <a:xfrm>
+            <a:off x="10464695" y="5093207"/>
+            <a:ext cx="12801" cy="146304"/>
+          </a:xfrm>
+          <a:prstGeom prst="rect">
+            <a:avLst/>
+          </a:prstGeom>
+          <a:solidFill>
+            <a:srgbClr val="5D6C82"/>
+          </a:solidFill>
+          <a:ln>
+            <a:noFill/>
+          </a:ln>
+          <a:effectLst/>
+        </p:spPr>
+        <p:style>
+          <a:lnRef idx="1">
+            <a:schemeClr val="accent1"/>
+          </a:lnRef>
+          <a:fillRef idx="3">
+            <a:schemeClr val="accent1"/>
+          </a:fillRef>
+          <a:effectRef idx="2">
+            <a:schemeClr val="accent1"/>
+          </a:effectRef>
+          <a:fontRef idx="minor">
+            <a:schemeClr val="lt1"/>
+          </a:fontRef>
+        </p:style>
+        <p:txBody>
+          <a:bodyPr rtlCol="0" anchor="ctr"/>
+          <a:lstStyle/>
+          <a:p>
+            <a:pPr algn="ctr"/>
+          </a:p>
+        </p:txBody>
+      </p:sp>
+      <p:sp>
+        <p:nvSpPr>
+          <p:cNvPr id="17477" name="Rectangle 17476"/>
+          <p:cNvSpPr/>
+          <p:nvPr/>
+        </p:nvSpPr>
+        <p:spPr>
+          <a:xfrm>
+            <a:off x="10611080" y="5093207"/>
+            <a:ext cx="12801" cy="146304"/>
+          </a:xfrm>
+          <a:prstGeom prst="rect">
+            <a:avLst/>
+          </a:prstGeom>
+          <a:solidFill>
+            <a:srgbClr val="5D6C82"/>
+          </a:solidFill>
+          <a:ln>
+            <a:noFill/>
+          </a:ln>
+          <a:effectLst/>
+        </p:spPr>
+        <p:style>
+          <a:lnRef idx="1">
+            <a:schemeClr val="accent1"/>
+          </a:lnRef>
+          <a:fillRef idx="3">
+            <a:schemeClr val="accent1"/>
+          </a:fillRef>
+          <a:effectRef idx="2">
+            <a:schemeClr val="accent1"/>
+          </a:effectRef>
+          <a:fontRef idx="minor">
+            <a:schemeClr val="lt1"/>
+          </a:fontRef>
+        </p:style>
+        <p:txBody>
+          <a:bodyPr rtlCol="0" anchor="ctr"/>
+          <a:lstStyle/>
+          <a:p>
+            <a:pPr algn="ctr"/>
+          </a:p>
+        </p:txBody>
+      </p:sp>
+      <p:sp>
+        <p:nvSpPr>
+          <p:cNvPr id="17478" name="Rectangle 17477"/>
+          <p:cNvSpPr/>
+          <p:nvPr/>
+        </p:nvSpPr>
+        <p:spPr>
+          <a:xfrm>
+            <a:off x="10745578" y="5029200"/>
+            <a:ext cx="45720" cy="274320"/>
+          </a:xfrm>
+          <a:prstGeom prst="rect">
+            <a:avLst/>
+          </a:prstGeom>
+          <a:solidFill>
+            <a:srgbClr val="12A150"/>
+          </a:solidFill>
+          <a:ln>
+            <a:noFill/>
+          </a:ln>
+          <a:effectLst/>
+        </p:spPr>
+        <p:style>
+          <a:lnRef idx="1">
+            <a:schemeClr val="accent1"/>
+          </a:lnRef>
+          <a:fillRef idx="3">
+            <a:schemeClr val="accent1"/>
+          </a:fillRef>
+          <a:effectRef idx="2">
+            <a:schemeClr val="accent1"/>
+          </a:effectRef>
+          <a:fontRef idx="minor">
+            <a:schemeClr val="lt1"/>
+          </a:fontRef>
+        </p:style>
+        <p:txBody>
+          <a:bodyPr rtlCol="0" anchor="ctr"/>
+          <a:lstStyle/>
+          <a:p>
+            <a:pPr algn="ctr"/>
+          </a:p>
+        </p:txBody>
+      </p:sp>
+      <p:sp>
+        <p:nvSpPr>
+          <p:cNvPr id="17479" name="Rectangle 17478"/>
+          <p:cNvSpPr/>
+          <p:nvPr/>
+        </p:nvSpPr>
+        <p:spPr>
+          <a:xfrm>
+            <a:off x="10903850" y="5093207"/>
+            <a:ext cx="12801" cy="146304"/>
+          </a:xfrm>
+          <a:prstGeom prst="rect">
+            <a:avLst/>
+          </a:prstGeom>
+          <a:solidFill>
+            <a:srgbClr val="5D6C82"/>
+          </a:solidFill>
+          <a:ln>
+            <a:noFill/>
+          </a:ln>
+          <a:effectLst/>
+        </p:spPr>
+        <p:style>
+          <a:lnRef idx="1">
+            <a:schemeClr val="accent1"/>
+          </a:lnRef>
+          <a:fillRef idx="3">
+            <a:schemeClr val="accent1"/>
+          </a:fillRef>
+          <a:effectRef idx="2">
+            <a:schemeClr val="accent1"/>
+          </a:effectRef>
+          <a:fontRef idx="minor">
+            <a:schemeClr val="lt1"/>
+          </a:fontRef>
+        </p:style>
+        <p:txBody>
+          <a:bodyPr rtlCol="0" anchor="ctr"/>
+          <a:lstStyle/>
+          <a:p>
+            <a:pPr algn="ctr"/>
+          </a:p>
+        </p:txBody>
+      </p:sp>
+      <p:sp>
+        <p:nvSpPr>
+          <p:cNvPr id="17480" name="Rectangle 17479"/>
+          <p:cNvSpPr/>
+          <p:nvPr/>
+        </p:nvSpPr>
+        <p:spPr>
+          <a:xfrm>
+            <a:off x="11050236" y="5093207"/>
+            <a:ext cx="12801" cy="146304"/>
+          </a:xfrm>
+          <a:prstGeom prst="rect">
+            <a:avLst/>
+          </a:prstGeom>
+          <a:solidFill>
+            <a:srgbClr val="5D6C82"/>
+          </a:solidFill>
+          <a:ln>
+            <a:noFill/>
+          </a:ln>
+          <a:effectLst/>
+        </p:spPr>
+        <p:style>
+          <a:lnRef idx="1">
+            <a:schemeClr val="accent1"/>
+          </a:lnRef>
+          <a:fillRef idx="3">
+            <a:schemeClr val="accent1"/>
+          </a:fillRef>
+          <a:effectRef idx="2">
+            <a:schemeClr val="accent1"/>
+          </a:effectRef>
+          <a:fontRef idx="minor">
+            <a:schemeClr val="lt1"/>
+          </a:fontRef>
+        </p:style>
+        <p:txBody>
+          <a:bodyPr rtlCol="0" anchor="ctr"/>
+          <a:lstStyle/>
+          <a:p>
+            <a:pPr algn="ctr"/>
+          </a:p>
+        </p:txBody>
+      </p:sp>
+      <p:sp>
+        <p:nvSpPr>
+          <p:cNvPr id="17481" name="Rectangle 17480"/>
+          <p:cNvSpPr/>
+          <p:nvPr/>
+        </p:nvSpPr>
+        <p:spPr>
+          <a:xfrm>
+            <a:off x="11196621" y="5093207"/>
+            <a:ext cx="12801" cy="146304"/>
+          </a:xfrm>
+          <a:prstGeom prst="rect">
+            <a:avLst/>
+          </a:prstGeom>
+          <a:solidFill>
+            <a:srgbClr val="5D6C82"/>
+          </a:solidFill>
+          <a:ln>
+            <a:noFill/>
+          </a:ln>
+          <a:effectLst/>
+        </p:spPr>
+        <p:style>
+          <a:lnRef idx="1">
+            <a:schemeClr val="accent1"/>
+          </a:lnRef>
+          <a:fillRef idx="3">
+            <a:schemeClr val="accent1"/>
+          </a:fillRef>
+          <a:effectRef idx="2">
+            <a:schemeClr val="accent1"/>
+          </a:effectRef>
+          <a:fontRef idx="minor">
+            <a:schemeClr val="lt1"/>
+          </a:fontRef>
+        </p:style>
+        <p:txBody>
+          <a:bodyPr rtlCol="0" anchor="ctr"/>
+          <a:lstStyle/>
+          <a:p>
+            <a:pPr algn="ctr"/>
+          </a:p>
+        </p:txBody>
+      </p:sp>
+      <p:sp>
+        <p:nvSpPr>
+          <p:cNvPr id="17482" name="Rectangle 17481"/>
+          <p:cNvSpPr/>
+          <p:nvPr/>
+        </p:nvSpPr>
+        <p:spPr>
+          <a:xfrm>
+            <a:off x="11343006" y="5093207"/>
+            <a:ext cx="12801" cy="146304"/>
+          </a:xfrm>
+          <a:prstGeom prst="rect">
+            <a:avLst/>
+          </a:prstGeom>
+          <a:solidFill>
+            <a:srgbClr val="5D6C82"/>
+          </a:solidFill>
+          <a:ln>
+            <a:noFill/>
+          </a:ln>
+          <a:effectLst/>
+        </p:spPr>
+        <p:style>
+          <a:lnRef idx="1">
+            <a:schemeClr val="accent1"/>
+          </a:lnRef>
+          <a:fillRef idx="3">
+            <a:schemeClr val="accent1"/>
+          </a:fillRef>
+          <a:effectRef idx="2">
+            <a:schemeClr val="accent1"/>
+          </a:effectRef>
+          <a:fontRef idx="minor">
+            <a:schemeClr val="lt1"/>
+          </a:fontRef>
+        </p:style>
+        <p:txBody>
+          <a:bodyPr rtlCol="0" anchor="ctr"/>
+          <a:lstStyle/>
+          <a:p>
+            <a:pPr algn="ctr"/>
+          </a:p>
+        </p:txBody>
+      </p:sp>
+      <p:sp>
+        <p:nvSpPr>
+          <p:cNvPr id="17483" name="Rectangle 17482"/>
+          <p:cNvSpPr/>
+          <p:nvPr/>
+        </p:nvSpPr>
+        <p:spPr>
+          <a:xfrm>
+            <a:off x="11489391" y="5093207"/>
+            <a:ext cx="12801" cy="146304"/>
+          </a:xfrm>
+          <a:prstGeom prst="rect">
+            <a:avLst/>
+          </a:prstGeom>
+          <a:solidFill>
+            <a:srgbClr val="5D6C82"/>
+          </a:solidFill>
+          <a:ln>
+            <a:noFill/>
+          </a:ln>
+          <a:effectLst/>
+        </p:spPr>
+        <p:style>
+          <a:lnRef idx="1">
+            <a:schemeClr val="accent1"/>
+          </a:lnRef>
+          <a:fillRef idx="3">
+            <a:schemeClr val="accent1"/>
+          </a:fillRef>
+          <a:effectRef idx="2">
+            <a:schemeClr val="accent1"/>
+          </a:effectRef>
+          <a:fontRef idx="minor">
+            <a:schemeClr val="lt1"/>
+          </a:fontRef>
+        </p:style>
+        <p:txBody>
+          <a:bodyPr rtlCol="0" anchor="ctr"/>
+          <a:lstStyle/>
+          <a:p>
+            <a:pPr algn="ctr"/>
+          </a:p>
+        </p:txBody>
+      </p:sp>
+      <p:sp>
+        <p:nvSpPr>
+          <p:cNvPr id="17484" name="Rectangle 17483"/>
+          <p:cNvSpPr/>
+          <p:nvPr/>
+        </p:nvSpPr>
+        <p:spPr>
+          <a:xfrm>
+            <a:off x="11635776" y="5093207"/>
+            <a:ext cx="12801" cy="146304"/>
+          </a:xfrm>
+          <a:prstGeom prst="rect">
+            <a:avLst/>
+          </a:prstGeom>
+          <a:solidFill>
+            <a:srgbClr val="5D6C82"/>
+          </a:solidFill>
+          <a:ln>
+            <a:noFill/>
+          </a:ln>
+          <a:effectLst/>
+        </p:spPr>
+        <p:style>
+          <a:lnRef idx="1">
+            <a:schemeClr val="accent1"/>
+          </a:lnRef>
+          <a:fillRef idx="3">
+            <a:schemeClr val="accent1"/>
+          </a:fillRef>
+          <a:effectRef idx="2">
+            <a:schemeClr val="accent1"/>
+          </a:effectRef>
+          <a:fontRef idx="minor">
+            <a:schemeClr val="lt1"/>
+          </a:fontRef>
+        </p:style>
+        <p:txBody>
+          <a:bodyPr rtlCol="0" anchor="ctr"/>
+          <a:lstStyle/>
+          <a:p>
+            <a:pPr algn="ctr"/>
+          </a:p>
+        </p:txBody>
+      </p:sp>
+      <p:sp>
+        <p:nvSpPr>
+          <p:cNvPr id="17485" name="TextBox 17484"/>
+          <p:cNvSpPr txBox="1"/>
+          <p:nvPr/>
+        </p:nvSpPr>
+        <p:spPr>
+          <a:xfrm>
+            <a:off x="10287000" y="4453128"/>
+            <a:ext cx="1463040" cy="164592"/>
+          </a:xfrm>
+          <a:prstGeom prst="rect">
+            <a:avLst/>
+          </a:prstGeom>
+          <a:noFill/>
+        </p:spPr>
+        <p:txBody>
+          <a:bodyPr wrap="square" anchor="ctr" lIns="0" rIns="0" tIns="0" bIns="0">
+            <a:spAutoFit/>
+          </a:bodyPr>
+          <a:lstStyle/>
+          <a:p>
+            <a:pPr algn="r"/>
+            <a:r>
+              <a:rPr sz="950" b="1">
+                <a:solidFill>
+                  <a:srgbClr val="D93A32"/>
+                </a:solidFill>
+                <a:latin typeface="Arial"/>
+              </a:rPr>
+              <a:t>never caught ✗</a:t>
+            </a:r>
+          </a:p>
+        </p:txBody>
+      </p:sp>
+      <p:cxnSp>
+        <p:nvCxnSpPr>
+          <p:cNvPr id="17486" name="Connector 17485"/>
+          <p:cNvCxnSpPr/>
+          <p:nvPr/>
+        </p:nvCxnSpPr>
+        <p:spPr>
+          <a:xfrm>
+            <a:off x="10763866" y="4462272"/>
+            <a:ext cx="0" cy="585216"/>
+          </a:xfrm>
+          <a:prstGeom prst="line">
+            <a:avLst/>
+          </a:prstGeom>
+          <a:ln w="15875">
+            <a:solidFill>
+              <a:srgbClr val="12A150"/>
+            </a:solidFill>
+          </a:ln>
+        </p:spPr>
+        <p:style>
+          <a:lnRef idx="2">
+            <a:schemeClr val="accent1"/>
+          </a:lnRef>
+          <a:fillRef idx="0">
+            <a:schemeClr val="accent1"/>
+          </a:fillRef>
+          <a:effectRef idx="1">
+            <a:schemeClr val="accent1"/>
+          </a:effectRef>
+          <a:fontRef idx="minor">
+            <a:schemeClr val="tx1"/>
+          </a:fontRef>
+        </p:style>
+      </p:cxnSp>
+      <p:sp>
+        <p:nvSpPr>
+          <p:cNvPr id="17487" name="TextBox 17486"/>
+          <p:cNvSpPr txBox="1"/>
+          <p:nvPr/>
+        </p:nvSpPr>
+        <p:spPr>
+          <a:xfrm>
+            <a:off x="10818730" y="4864607"/>
+            <a:ext cx="1463040" cy="164592"/>
+          </a:xfrm>
+          <a:prstGeom prst="rect">
+            <a:avLst/>
+          </a:prstGeom>
+          <a:noFill/>
+        </p:spPr>
+        <p:txBody>
+          <a:bodyPr wrap="square" anchor="ctr" lIns="0" rIns="0" tIns="0" bIns="0">
+            <a:spAutoFit/>
+          </a:bodyPr>
+          <a:lstStyle/>
+          <a:p>
+            <a:pPr algn="l"/>
+            <a:r>
+              <a:rPr sz="950" b="1">
+                <a:solidFill>
+                  <a:srgbClr val="12A150"/>
+                </a:solidFill>
+                <a:latin typeface="Arial"/>
+              </a:rPr>
+              <a:t>caught at 3.23 s ✓</a:t>
+            </a:r>
+          </a:p>
+        </p:txBody>
+      </p:sp>
+      <p:sp>
+        <p:nvSpPr>
+          <p:cNvPr id="17488" name="TextBox 17487"/>
+          <p:cNvSpPr txBox="1"/>
+          <p:nvPr/>
+        </p:nvSpPr>
+        <p:spPr>
+          <a:xfrm>
+            <a:off x="8046720" y="5321807"/>
+            <a:ext cx="457200" cy="164592"/>
+          </a:xfrm>
+          <a:prstGeom prst="rect">
+            <a:avLst/>
+          </a:prstGeom>
+          <a:noFill/>
+        </p:spPr>
+        <p:txBody>
+          <a:bodyPr wrap="square" anchor="ctr" lIns="0" rIns="0" tIns="0" bIns="0">
+            <a:spAutoFit/>
+          </a:bodyPr>
+          <a:lstStyle/>
+          <a:p>
+            <a:pPr algn="ctr"/>
+            <a:r>
+              <a:rPr sz="850" b="0">
+                <a:solidFill>
+                  <a:srgbClr val="5D6C82"/>
+                </a:solidFill>
+                <a:latin typeface="Arial"/>
+              </a:rPr>
+              <a:t>0.0 s</a:t>
+            </a:r>
+          </a:p>
+        </p:txBody>
+      </p:sp>
+      <p:sp>
+        <p:nvSpPr>
+          <p:cNvPr id="17489" name="TextBox 17488"/>
+          <p:cNvSpPr txBox="1"/>
+          <p:nvPr/>
+        </p:nvSpPr>
+        <p:spPr>
+          <a:xfrm>
+            <a:off x="8817167" y="5321807"/>
+            <a:ext cx="457200" cy="164592"/>
+          </a:xfrm>
+          <a:prstGeom prst="rect">
+            <a:avLst/>
+          </a:prstGeom>
+          <a:noFill/>
+        </p:spPr>
+        <p:txBody>
+          <a:bodyPr wrap="square" anchor="ctr" lIns="0" rIns="0" tIns="0" bIns="0">
+            <a:spAutoFit/>
+          </a:bodyPr>
+          <a:lstStyle/>
+          <a:p>
+            <a:pPr algn="ctr"/>
+            <a:r>
+              <a:rPr sz="850" b="0">
+                <a:solidFill>
+                  <a:srgbClr val="5D6C82"/>
+                </a:solidFill>
+                <a:latin typeface="Arial"/>
+              </a:rPr>
+              <a:t>1.0 s</a:t>
+            </a:r>
+          </a:p>
+        </p:txBody>
+      </p:sp>
+      <p:sp>
+        <p:nvSpPr>
+          <p:cNvPr id="17490" name="TextBox 17489"/>
+          <p:cNvSpPr txBox="1"/>
+          <p:nvPr/>
+        </p:nvSpPr>
+        <p:spPr>
+          <a:xfrm>
+            <a:off x="9587615" y="5321807"/>
+            <a:ext cx="457200" cy="164592"/>
+          </a:xfrm>
+          <a:prstGeom prst="rect">
+            <a:avLst/>
+          </a:prstGeom>
+          <a:noFill/>
+        </p:spPr>
+        <p:txBody>
+          <a:bodyPr wrap="square" anchor="ctr" lIns="0" rIns="0" tIns="0" bIns="0">
+            <a:spAutoFit/>
+          </a:bodyPr>
+          <a:lstStyle/>
+          <a:p>
+            <a:pPr algn="ctr"/>
+            <a:r>
+              <a:rPr sz="850" b="0">
+                <a:solidFill>
+                  <a:srgbClr val="5D6C82"/>
+                </a:solidFill>
+                <a:latin typeface="Arial"/>
+              </a:rPr>
+              <a:t>2.0 s</a:t>
+            </a:r>
+          </a:p>
+        </p:txBody>
+      </p:sp>
+      <p:sp>
+        <p:nvSpPr>
+          <p:cNvPr id="17491" name="TextBox 17490"/>
+          <p:cNvSpPr txBox="1"/>
+          <p:nvPr/>
+        </p:nvSpPr>
+        <p:spPr>
+          <a:xfrm>
+            <a:off x="10358063" y="5321807"/>
+            <a:ext cx="457200" cy="164592"/>
+          </a:xfrm>
+          <a:prstGeom prst="rect">
+            <a:avLst/>
+          </a:prstGeom>
+          <a:noFill/>
+        </p:spPr>
+        <p:txBody>
+          <a:bodyPr wrap="square" anchor="ctr" lIns="0" rIns="0" tIns="0" bIns="0">
+            <a:spAutoFit/>
+          </a:bodyPr>
+          <a:lstStyle/>
+          <a:p>
+            <a:pPr algn="ctr"/>
+            <a:r>
+              <a:rPr sz="850" b="0">
+                <a:solidFill>
+                  <a:srgbClr val="5D6C82"/>
+                </a:solidFill>
+                <a:latin typeface="Arial"/>
+              </a:rPr>
+              <a:t>3.0 s</a:t>
+            </a:r>
+          </a:p>
+        </p:txBody>
+      </p:sp>
+      <p:sp>
+        <p:nvSpPr>
+          <p:cNvPr id="17492" name="TextBox 17491"/>
+          <p:cNvSpPr txBox="1"/>
+          <p:nvPr/>
+        </p:nvSpPr>
+        <p:spPr>
+          <a:xfrm>
+            <a:off x="11128511" y="5321807"/>
+            <a:ext cx="457200" cy="164592"/>
+          </a:xfrm>
+          <a:prstGeom prst="rect">
+            <a:avLst/>
+          </a:prstGeom>
+          <a:noFill/>
+        </p:spPr>
+        <p:txBody>
+          <a:bodyPr wrap="square" anchor="ctr" lIns="0" rIns="0" tIns="0" bIns="0">
+            <a:spAutoFit/>
+          </a:bodyPr>
+          <a:lstStyle/>
+          <a:p>
+            <a:pPr algn="ctr"/>
+            <a:r>
+              <a:rPr sz="850" b="0">
+                <a:solidFill>
+                  <a:srgbClr val="5D6C82"/>
+                </a:solidFill>
+                <a:latin typeface="Arial"/>
+              </a:rPr>
+              <a:t>4.0 s</a:t>
+            </a:r>
+          </a:p>
+        </p:txBody>
+      </p:sp>
+      <p:sp>
+        <p:nvSpPr>
+          <p:cNvPr id="17493" name="TextBox 17492"/>
+          <p:cNvSpPr txBox="1"/>
+          <p:nvPr/>
+        </p:nvSpPr>
+        <p:spPr>
+          <a:xfrm>
+            <a:off x="6675120" y="5596128"/>
+            <a:ext cx="5120640" cy="566928"/>
+          </a:xfrm>
+          <a:prstGeom prst="rect">
+            <a:avLst/>
+          </a:prstGeom>
+          <a:noFill/>
+        </p:spPr>
+        <p:txBody>
+          <a:bodyPr wrap="square" lIns="45720" rIns="45720">
+            <a:spAutoFit/>
+          </a:bodyPr>
+          <a:lstStyle/>
+          <a:p>
+            <a:r>
+              <a:rPr sz="1050" b="0">
+                <a:solidFill>
+                  <a:srgbClr val="5D6C82"/>
+                </a:solidFill>
+                <a:latin typeface="Arial"/>
+              </a:rPr>
+              <a:t>Red = radar beam pointing at us. Ticks = receiver visits. </a:t>
+            </a:r>
+            <a:r>
+              <a:rPr sz="1050" b="1">
+                <a:solidFill>
+                  <a:srgbClr val="12A150"/>
+                </a:solidFill>
+                <a:latin typeface="Arial"/>
+              </a:rPr>
+              <a:t>Green = caught. </a:t>
+            </a:r>
+            <a:r>
+              <a:rPr sz="1050" b="0">
+                <a:solidFill>
+                  <a:srgbClr val="5D6C82"/>
+                </a:solidFill>
+                <a:latin typeface="Arial"/>
+              </a:rPr>
+              <a:t>The AI goes further: it learns each radar's rotation and returns exactly when the beam is due.</a:t>
+            </a:r>
+          </a:p>
+        </p:txBody>
+      </p:sp>
     </p:spTree>
     <p:extLst>
       <p:ext uri="{BB962C8B-B14F-4D97-AF65-F5344CB8AC3E}">
